--- a/exports/pptx/lessons/middle-module-06-moon-phases-tithi/day-01-moon-and-why.pptx
+++ b/exports/pptx/lessons/middle-module-06-moon-phases-tithi/day-01-moon-and-why.pptx
@@ -17,9 +17,16 @@
     <p:sldId id="265" r:id="rId11"/>
     <p:sldId id="266" r:id="rId12"/>
     <p:sldId id="267" r:id="rId13"/>
+    <p:sldId id="268" r:id="rId14"/>
+    <p:sldId id="269" r:id="rId15"/>
+    <p:sldId id="270" r:id="rId16"/>
+    <p:sldId id="271" r:id="rId17"/>
+    <p:sldId id="272" r:id="rId18"/>
+    <p:sldId id="273" r:id="rId19"/>
+    <p:sldId id="274" r:id="rId20"/>
   </p:sldIdLst>
   <p:notesMasterIdLst>
-    <p:notesMasterId r:id="rId14"/>
+    <p:notesMasterId r:id="rId21"/>
   </p:notesMasterIdLst>
   <p:sldSz cx="9144000" cy="5143500"/>
   <p:notesSz cx="5143500" cy="9144000"/>
@@ -801,6 +808,622 @@
             <a:fld id="{F7021451-1387-4CA6-816F-3879F97B5CBC}" type="slidenum">
               <a:rPr lang="en-US"/>
               <a:t>12</a:t>
+            </a:fld>
+            <a:endParaRPr lang="en-US"/>
+          </a:p>
+        </p:txBody>
+      </p:sp>
+    </p:spTree>
+    <p:extLst>
+      <p:ext uri="{BB962C8B-B14F-4D97-AF65-F5344CB8AC3E}">
+        <p14:creationId xmlns:p14="http://schemas.microsoft.com/office/powerpoint/2010/main" val="1024086991"/>
+      </p:ext>
+    </p:extLst>
+  </p:cSld>
+  <p:clrMapOvr>
+    <a:masterClrMapping/>
+  </p:clrMapOvr>
+</p:notes>
+</file>
+
+<file path=ppt/notesSlides/notesSlide13.xml><?xml version="1.0" encoding="utf-8"?>
+<p:notes xmlns:a="http://schemas.openxmlformats.org/drawingml/2006/main" xmlns:r="http://schemas.openxmlformats.org/officeDocument/2006/relationships" xmlns:p="http://schemas.openxmlformats.org/presentationml/2006/main">
+  <p:cSld>
+    <p:spTree>
+      <p:nvGrpSpPr>
+        <p:cNvPr id="1" name=""/>
+        <p:cNvGrpSpPr/>
+        <p:nvPr/>
+      </p:nvGrpSpPr>
+      <p:grpSpPr>
+        <a:xfrm>
+          <a:off x="0" y="0"/>
+          <a:ext cx="0" cy="0"/>
+          <a:chOff x="0" y="0"/>
+          <a:chExt cx="0" cy="0"/>
+        </a:xfrm>
+      </p:grpSpPr>
+      <p:sp>
+        <p:nvSpPr>
+          <p:cNvPr id="2" name="Slide Image Placeholder 1"/>
+          <p:cNvSpPr>
+            <a:spLocks noGrp="1" noRot="1" noChangeAspect="1"/>
+          </p:cNvSpPr>
+          <p:nvPr>
+            <p:ph type="sldImg"/>
+          </p:nvPr>
+        </p:nvSpPr>
+        <p:spPr/>
+      </p:sp>
+      <p:sp>
+        <p:nvSpPr>
+          <p:cNvPr id="3" name="Notes Placeholder 2"/>
+          <p:cNvSpPr>
+            <a:spLocks noGrp="1"/>
+          </p:cNvSpPr>
+          <p:nvPr>
+            <p:ph type="body" idx="1"/>
+          </p:nvPr>
+        </p:nvSpPr>
+        <p:spPr/>
+        <p:txBody>
+          <a:bodyPr/>
+          <a:lstStyle/>
+          <a:p>
+            <a:r>
+              <a:rPr lang="en-US" dirty="0"/>
+              <a:t/>
+            </a:r>
+            <a:endParaRPr lang="en-US" dirty="0"/>
+          </a:p>
+        </p:txBody>
+      </p:sp>
+      <p:sp>
+        <p:nvSpPr>
+          <p:cNvPr id="4" name="Slide Number Placeholder 3"/>
+          <p:cNvSpPr>
+            <a:spLocks noGrp="1"/>
+          </p:cNvSpPr>
+          <p:nvPr>
+            <p:ph type="sldNum" sz="quarter" idx="10"/>
+          </p:nvPr>
+        </p:nvSpPr>
+        <p:spPr/>
+        <p:txBody>
+          <a:bodyPr/>
+          <a:lstStyle/>
+          <a:p>
+            <a:fld id="{F7021451-1387-4CA6-816F-3879F97B5CBC}" type="slidenum">
+              <a:rPr lang="en-US"/>
+              <a:t>13</a:t>
+            </a:fld>
+            <a:endParaRPr lang="en-US"/>
+          </a:p>
+        </p:txBody>
+      </p:sp>
+    </p:spTree>
+    <p:extLst>
+      <p:ext uri="{BB962C8B-B14F-4D97-AF65-F5344CB8AC3E}">
+        <p14:creationId xmlns:p14="http://schemas.microsoft.com/office/powerpoint/2010/main" val="1024086991"/>
+      </p:ext>
+    </p:extLst>
+  </p:cSld>
+  <p:clrMapOvr>
+    <a:masterClrMapping/>
+  </p:clrMapOvr>
+</p:notes>
+</file>
+
+<file path=ppt/notesSlides/notesSlide14.xml><?xml version="1.0" encoding="utf-8"?>
+<p:notes xmlns:a="http://schemas.openxmlformats.org/drawingml/2006/main" xmlns:r="http://schemas.openxmlformats.org/officeDocument/2006/relationships" xmlns:p="http://schemas.openxmlformats.org/presentationml/2006/main">
+  <p:cSld>
+    <p:spTree>
+      <p:nvGrpSpPr>
+        <p:cNvPr id="1" name=""/>
+        <p:cNvGrpSpPr/>
+        <p:nvPr/>
+      </p:nvGrpSpPr>
+      <p:grpSpPr>
+        <a:xfrm>
+          <a:off x="0" y="0"/>
+          <a:ext cx="0" cy="0"/>
+          <a:chOff x="0" y="0"/>
+          <a:chExt cx="0" cy="0"/>
+        </a:xfrm>
+      </p:grpSpPr>
+      <p:sp>
+        <p:nvSpPr>
+          <p:cNvPr id="2" name="Slide Image Placeholder 1"/>
+          <p:cNvSpPr>
+            <a:spLocks noGrp="1" noRot="1" noChangeAspect="1"/>
+          </p:cNvSpPr>
+          <p:nvPr>
+            <p:ph type="sldImg"/>
+          </p:nvPr>
+        </p:nvSpPr>
+        <p:spPr/>
+      </p:sp>
+      <p:sp>
+        <p:nvSpPr>
+          <p:cNvPr id="3" name="Notes Placeholder 2"/>
+          <p:cNvSpPr>
+            <a:spLocks noGrp="1"/>
+          </p:cNvSpPr>
+          <p:nvPr>
+            <p:ph type="body" idx="1"/>
+          </p:nvPr>
+        </p:nvSpPr>
+        <p:spPr/>
+        <p:txBody>
+          <a:bodyPr/>
+          <a:lstStyle/>
+          <a:p>
+            <a:r>
+              <a:rPr lang="en-US" dirty="0"/>
+              <a:t/>
+            </a:r>
+            <a:endParaRPr lang="en-US" dirty="0"/>
+          </a:p>
+        </p:txBody>
+      </p:sp>
+      <p:sp>
+        <p:nvSpPr>
+          <p:cNvPr id="4" name="Slide Number Placeholder 3"/>
+          <p:cNvSpPr>
+            <a:spLocks noGrp="1"/>
+          </p:cNvSpPr>
+          <p:nvPr>
+            <p:ph type="sldNum" sz="quarter" idx="10"/>
+          </p:nvPr>
+        </p:nvSpPr>
+        <p:spPr/>
+        <p:txBody>
+          <a:bodyPr/>
+          <a:lstStyle/>
+          <a:p>
+            <a:fld id="{F7021451-1387-4CA6-816F-3879F97B5CBC}" type="slidenum">
+              <a:rPr lang="en-US"/>
+              <a:t>14</a:t>
+            </a:fld>
+            <a:endParaRPr lang="en-US"/>
+          </a:p>
+        </p:txBody>
+      </p:sp>
+    </p:spTree>
+    <p:extLst>
+      <p:ext uri="{BB962C8B-B14F-4D97-AF65-F5344CB8AC3E}">
+        <p14:creationId xmlns:p14="http://schemas.microsoft.com/office/powerpoint/2010/main" val="1024086991"/>
+      </p:ext>
+    </p:extLst>
+  </p:cSld>
+  <p:clrMapOvr>
+    <a:masterClrMapping/>
+  </p:clrMapOvr>
+</p:notes>
+</file>
+
+<file path=ppt/notesSlides/notesSlide15.xml><?xml version="1.0" encoding="utf-8"?>
+<p:notes xmlns:a="http://schemas.openxmlformats.org/drawingml/2006/main" xmlns:r="http://schemas.openxmlformats.org/officeDocument/2006/relationships" xmlns:p="http://schemas.openxmlformats.org/presentationml/2006/main">
+  <p:cSld>
+    <p:spTree>
+      <p:nvGrpSpPr>
+        <p:cNvPr id="1" name=""/>
+        <p:cNvGrpSpPr/>
+        <p:nvPr/>
+      </p:nvGrpSpPr>
+      <p:grpSpPr>
+        <a:xfrm>
+          <a:off x="0" y="0"/>
+          <a:ext cx="0" cy="0"/>
+          <a:chOff x="0" y="0"/>
+          <a:chExt cx="0" cy="0"/>
+        </a:xfrm>
+      </p:grpSpPr>
+      <p:sp>
+        <p:nvSpPr>
+          <p:cNvPr id="2" name="Slide Image Placeholder 1"/>
+          <p:cNvSpPr>
+            <a:spLocks noGrp="1" noRot="1" noChangeAspect="1"/>
+          </p:cNvSpPr>
+          <p:nvPr>
+            <p:ph type="sldImg"/>
+          </p:nvPr>
+        </p:nvSpPr>
+        <p:spPr/>
+      </p:sp>
+      <p:sp>
+        <p:nvSpPr>
+          <p:cNvPr id="3" name="Notes Placeholder 2"/>
+          <p:cNvSpPr>
+            <a:spLocks noGrp="1"/>
+          </p:cNvSpPr>
+          <p:nvPr>
+            <p:ph type="body" idx="1"/>
+          </p:nvPr>
+        </p:nvSpPr>
+        <p:spPr/>
+        <p:txBody>
+          <a:bodyPr/>
+          <a:lstStyle/>
+          <a:p>
+            <a:r>
+              <a:rPr lang="en-US" dirty="0"/>
+              <a:t/>
+            </a:r>
+            <a:endParaRPr lang="en-US" dirty="0"/>
+          </a:p>
+        </p:txBody>
+      </p:sp>
+      <p:sp>
+        <p:nvSpPr>
+          <p:cNvPr id="4" name="Slide Number Placeholder 3"/>
+          <p:cNvSpPr>
+            <a:spLocks noGrp="1"/>
+          </p:cNvSpPr>
+          <p:nvPr>
+            <p:ph type="sldNum" sz="quarter" idx="10"/>
+          </p:nvPr>
+        </p:nvSpPr>
+        <p:spPr/>
+        <p:txBody>
+          <a:bodyPr/>
+          <a:lstStyle/>
+          <a:p>
+            <a:fld id="{F7021451-1387-4CA6-816F-3879F97B5CBC}" type="slidenum">
+              <a:rPr lang="en-US"/>
+              <a:t>15</a:t>
+            </a:fld>
+            <a:endParaRPr lang="en-US"/>
+          </a:p>
+        </p:txBody>
+      </p:sp>
+    </p:spTree>
+    <p:extLst>
+      <p:ext uri="{BB962C8B-B14F-4D97-AF65-F5344CB8AC3E}">
+        <p14:creationId xmlns:p14="http://schemas.microsoft.com/office/powerpoint/2010/main" val="1024086991"/>
+      </p:ext>
+    </p:extLst>
+  </p:cSld>
+  <p:clrMapOvr>
+    <a:masterClrMapping/>
+  </p:clrMapOvr>
+</p:notes>
+</file>
+
+<file path=ppt/notesSlides/notesSlide16.xml><?xml version="1.0" encoding="utf-8"?>
+<p:notes xmlns:a="http://schemas.openxmlformats.org/drawingml/2006/main" xmlns:r="http://schemas.openxmlformats.org/officeDocument/2006/relationships" xmlns:p="http://schemas.openxmlformats.org/presentationml/2006/main">
+  <p:cSld>
+    <p:spTree>
+      <p:nvGrpSpPr>
+        <p:cNvPr id="1" name=""/>
+        <p:cNvGrpSpPr/>
+        <p:nvPr/>
+      </p:nvGrpSpPr>
+      <p:grpSpPr>
+        <a:xfrm>
+          <a:off x="0" y="0"/>
+          <a:ext cx="0" cy="0"/>
+          <a:chOff x="0" y="0"/>
+          <a:chExt cx="0" cy="0"/>
+        </a:xfrm>
+      </p:grpSpPr>
+      <p:sp>
+        <p:nvSpPr>
+          <p:cNvPr id="2" name="Slide Image Placeholder 1"/>
+          <p:cNvSpPr>
+            <a:spLocks noGrp="1" noRot="1" noChangeAspect="1"/>
+          </p:cNvSpPr>
+          <p:nvPr>
+            <p:ph type="sldImg"/>
+          </p:nvPr>
+        </p:nvSpPr>
+        <p:spPr/>
+      </p:sp>
+      <p:sp>
+        <p:nvSpPr>
+          <p:cNvPr id="3" name="Notes Placeholder 2"/>
+          <p:cNvSpPr>
+            <a:spLocks noGrp="1"/>
+          </p:cNvSpPr>
+          <p:nvPr>
+            <p:ph type="body" idx="1"/>
+          </p:nvPr>
+        </p:nvSpPr>
+        <p:spPr/>
+        <p:txBody>
+          <a:bodyPr/>
+          <a:lstStyle/>
+          <a:p>
+            <a:r>
+              <a:rPr lang="en-US" dirty="0"/>
+              <a:t/>
+            </a:r>
+            <a:endParaRPr lang="en-US" dirty="0"/>
+          </a:p>
+        </p:txBody>
+      </p:sp>
+      <p:sp>
+        <p:nvSpPr>
+          <p:cNvPr id="4" name="Slide Number Placeholder 3"/>
+          <p:cNvSpPr>
+            <a:spLocks noGrp="1"/>
+          </p:cNvSpPr>
+          <p:nvPr>
+            <p:ph type="sldNum" sz="quarter" idx="10"/>
+          </p:nvPr>
+        </p:nvSpPr>
+        <p:spPr/>
+        <p:txBody>
+          <a:bodyPr/>
+          <a:lstStyle/>
+          <a:p>
+            <a:fld id="{F7021451-1387-4CA6-816F-3879F97B5CBC}" type="slidenum">
+              <a:rPr lang="en-US"/>
+              <a:t>16</a:t>
+            </a:fld>
+            <a:endParaRPr lang="en-US"/>
+          </a:p>
+        </p:txBody>
+      </p:sp>
+    </p:spTree>
+    <p:extLst>
+      <p:ext uri="{BB962C8B-B14F-4D97-AF65-F5344CB8AC3E}">
+        <p14:creationId xmlns:p14="http://schemas.microsoft.com/office/powerpoint/2010/main" val="1024086991"/>
+      </p:ext>
+    </p:extLst>
+  </p:cSld>
+  <p:clrMapOvr>
+    <a:masterClrMapping/>
+  </p:clrMapOvr>
+</p:notes>
+</file>
+
+<file path=ppt/notesSlides/notesSlide17.xml><?xml version="1.0" encoding="utf-8"?>
+<p:notes xmlns:a="http://schemas.openxmlformats.org/drawingml/2006/main" xmlns:r="http://schemas.openxmlformats.org/officeDocument/2006/relationships" xmlns:p="http://schemas.openxmlformats.org/presentationml/2006/main">
+  <p:cSld>
+    <p:spTree>
+      <p:nvGrpSpPr>
+        <p:cNvPr id="1" name=""/>
+        <p:cNvGrpSpPr/>
+        <p:nvPr/>
+      </p:nvGrpSpPr>
+      <p:grpSpPr>
+        <a:xfrm>
+          <a:off x="0" y="0"/>
+          <a:ext cx="0" cy="0"/>
+          <a:chOff x="0" y="0"/>
+          <a:chExt cx="0" cy="0"/>
+        </a:xfrm>
+      </p:grpSpPr>
+      <p:sp>
+        <p:nvSpPr>
+          <p:cNvPr id="2" name="Slide Image Placeholder 1"/>
+          <p:cNvSpPr>
+            <a:spLocks noGrp="1" noRot="1" noChangeAspect="1"/>
+          </p:cNvSpPr>
+          <p:nvPr>
+            <p:ph type="sldImg"/>
+          </p:nvPr>
+        </p:nvSpPr>
+        <p:spPr/>
+      </p:sp>
+      <p:sp>
+        <p:nvSpPr>
+          <p:cNvPr id="3" name="Notes Placeholder 2"/>
+          <p:cNvSpPr>
+            <a:spLocks noGrp="1"/>
+          </p:cNvSpPr>
+          <p:nvPr>
+            <p:ph type="body" idx="1"/>
+          </p:nvPr>
+        </p:nvSpPr>
+        <p:spPr/>
+        <p:txBody>
+          <a:bodyPr/>
+          <a:lstStyle/>
+          <a:p>
+            <a:r>
+              <a:rPr lang="en-US" dirty="0"/>
+              <a:t/>
+            </a:r>
+            <a:endParaRPr lang="en-US" dirty="0"/>
+          </a:p>
+        </p:txBody>
+      </p:sp>
+      <p:sp>
+        <p:nvSpPr>
+          <p:cNvPr id="4" name="Slide Number Placeholder 3"/>
+          <p:cNvSpPr>
+            <a:spLocks noGrp="1"/>
+          </p:cNvSpPr>
+          <p:nvPr>
+            <p:ph type="sldNum" sz="quarter" idx="10"/>
+          </p:nvPr>
+        </p:nvSpPr>
+        <p:spPr/>
+        <p:txBody>
+          <a:bodyPr/>
+          <a:lstStyle/>
+          <a:p>
+            <a:fld id="{F7021451-1387-4CA6-816F-3879F97B5CBC}" type="slidenum">
+              <a:rPr lang="en-US"/>
+              <a:t>17</a:t>
+            </a:fld>
+            <a:endParaRPr lang="en-US"/>
+          </a:p>
+        </p:txBody>
+      </p:sp>
+    </p:spTree>
+    <p:extLst>
+      <p:ext uri="{BB962C8B-B14F-4D97-AF65-F5344CB8AC3E}">
+        <p14:creationId xmlns:p14="http://schemas.microsoft.com/office/powerpoint/2010/main" val="1024086991"/>
+      </p:ext>
+    </p:extLst>
+  </p:cSld>
+  <p:clrMapOvr>
+    <a:masterClrMapping/>
+  </p:clrMapOvr>
+</p:notes>
+</file>
+
+<file path=ppt/notesSlides/notesSlide18.xml><?xml version="1.0" encoding="utf-8"?>
+<p:notes xmlns:a="http://schemas.openxmlformats.org/drawingml/2006/main" xmlns:r="http://schemas.openxmlformats.org/officeDocument/2006/relationships" xmlns:p="http://schemas.openxmlformats.org/presentationml/2006/main">
+  <p:cSld>
+    <p:spTree>
+      <p:nvGrpSpPr>
+        <p:cNvPr id="1" name=""/>
+        <p:cNvGrpSpPr/>
+        <p:nvPr/>
+      </p:nvGrpSpPr>
+      <p:grpSpPr>
+        <a:xfrm>
+          <a:off x="0" y="0"/>
+          <a:ext cx="0" cy="0"/>
+          <a:chOff x="0" y="0"/>
+          <a:chExt cx="0" cy="0"/>
+        </a:xfrm>
+      </p:grpSpPr>
+      <p:sp>
+        <p:nvSpPr>
+          <p:cNvPr id="2" name="Slide Image Placeholder 1"/>
+          <p:cNvSpPr>
+            <a:spLocks noGrp="1" noRot="1" noChangeAspect="1"/>
+          </p:cNvSpPr>
+          <p:nvPr>
+            <p:ph type="sldImg"/>
+          </p:nvPr>
+        </p:nvSpPr>
+        <p:spPr/>
+      </p:sp>
+      <p:sp>
+        <p:nvSpPr>
+          <p:cNvPr id="3" name="Notes Placeholder 2"/>
+          <p:cNvSpPr>
+            <a:spLocks noGrp="1"/>
+          </p:cNvSpPr>
+          <p:nvPr>
+            <p:ph type="body" idx="1"/>
+          </p:nvPr>
+        </p:nvSpPr>
+        <p:spPr/>
+        <p:txBody>
+          <a:bodyPr/>
+          <a:lstStyle/>
+          <a:p>
+            <a:r>
+              <a:rPr lang="en-US" dirty="0"/>
+              <a:t/>
+            </a:r>
+            <a:endParaRPr lang="en-US" dirty="0"/>
+          </a:p>
+        </p:txBody>
+      </p:sp>
+      <p:sp>
+        <p:nvSpPr>
+          <p:cNvPr id="4" name="Slide Number Placeholder 3"/>
+          <p:cNvSpPr>
+            <a:spLocks noGrp="1"/>
+          </p:cNvSpPr>
+          <p:nvPr>
+            <p:ph type="sldNum" sz="quarter" idx="10"/>
+          </p:nvPr>
+        </p:nvSpPr>
+        <p:spPr/>
+        <p:txBody>
+          <a:bodyPr/>
+          <a:lstStyle/>
+          <a:p>
+            <a:fld id="{F7021451-1387-4CA6-816F-3879F97B5CBC}" type="slidenum">
+              <a:rPr lang="en-US"/>
+              <a:t>18</a:t>
+            </a:fld>
+            <a:endParaRPr lang="en-US"/>
+          </a:p>
+        </p:txBody>
+      </p:sp>
+    </p:spTree>
+    <p:extLst>
+      <p:ext uri="{BB962C8B-B14F-4D97-AF65-F5344CB8AC3E}">
+        <p14:creationId xmlns:p14="http://schemas.microsoft.com/office/powerpoint/2010/main" val="1024086991"/>
+      </p:ext>
+    </p:extLst>
+  </p:cSld>
+  <p:clrMapOvr>
+    <a:masterClrMapping/>
+  </p:clrMapOvr>
+</p:notes>
+</file>
+
+<file path=ppt/notesSlides/notesSlide19.xml><?xml version="1.0" encoding="utf-8"?>
+<p:notes xmlns:a="http://schemas.openxmlformats.org/drawingml/2006/main" xmlns:r="http://schemas.openxmlformats.org/officeDocument/2006/relationships" xmlns:p="http://schemas.openxmlformats.org/presentationml/2006/main">
+  <p:cSld>
+    <p:spTree>
+      <p:nvGrpSpPr>
+        <p:cNvPr id="1" name=""/>
+        <p:cNvGrpSpPr/>
+        <p:nvPr/>
+      </p:nvGrpSpPr>
+      <p:grpSpPr>
+        <a:xfrm>
+          <a:off x="0" y="0"/>
+          <a:ext cx="0" cy="0"/>
+          <a:chOff x="0" y="0"/>
+          <a:chExt cx="0" cy="0"/>
+        </a:xfrm>
+      </p:grpSpPr>
+      <p:sp>
+        <p:nvSpPr>
+          <p:cNvPr id="2" name="Slide Image Placeholder 1"/>
+          <p:cNvSpPr>
+            <a:spLocks noGrp="1" noRot="1" noChangeAspect="1"/>
+          </p:cNvSpPr>
+          <p:nvPr>
+            <p:ph type="sldImg"/>
+          </p:nvPr>
+        </p:nvSpPr>
+        <p:spPr/>
+      </p:sp>
+      <p:sp>
+        <p:nvSpPr>
+          <p:cNvPr id="3" name="Notes Placeholder 2"/>
+          <p:cNvSpPr>
+            <a:spLocks noGrp="1"/>
+          </p:cNvSpPr>
+          <p:nvPr>
+            <p:ph type="body" idx="1"/>
+          </p:nvPr>
+        </p:nvSpPr>
+        <p:spPr/>
+        <p:txBody>
+          <a:bodyPr/>
+          <a:lstStyle/>
+          <a:p>
+            <a:r>
+              <a:rPr lang="en-US" dirty="0"/>
+              <a:t/>
+            </a:r>
+            <a:endParaRPr lang="en-US" dirty="0"/>
+          </a:p>
+        </p:txBody>
+      </p:sp>
+      <p:sp>
+        <p:nvSpPr>
+          <p:cNvPr id="4" name="Slide Number Placeholder 3"/>
+          <p:cNvSpPr>
+            <a:spLocks noGrp="1"/>
+          </p:cNvSpPr>
+          <p:nvPr>
+            <p:ph type="sldNum" sz="quarter" idx="10"/>
+          </p:nvPr>
+        </p:nvSpPr>
+        <p:spPr/>
+        <p:txBody>
+          <a:bodyPr/>
+          <a:lstStyle/>
+          <a:p>
+            <a:fld id="{F7021451-1387-4CA6-816F-3879F97B5CBC}" type="slidenum">
+              <a:rPr lang="en-US"/>
+              <a:t>19</a:t>
             </a:fld>
             <a:endParaRPr lang="en-US"/>
           </a:p>
@@ -2100,102 +2723,6 @@
         </p:nvSpPr>
         <p:spPr>
           <a:xfrm>
-            <a:off x="406301" y="1223963"/>
-            <a:ext cx="8498026" cy="274290"/>
-          </a:xfrm>
-          <a:prstGeom prst="rect">
-            <a:avLst/>
-          </a:prstGeom>
-          <a:noFill/>
-          <a:ln/>
-        </p:spPr>
-        <p:txBody>
-          <a:bodyPr wrap="square" lIns="0" tIns="0" rIns="0" bIns="0" rtlCol="0" anchor="t"/>
-          <a:lstStyle/>
-          <a:p>
-            <a:pPr algn="l" indent="0" marL="0">
-              <a:lnSpc>
-                <a:spcPts val="2160"/>
-              </a:lnSpc>
-              <a:spcBef>
-                <a:spcPts val="600"/>
-              </a:spcBef>
-              <a:spcAft>
-                <a:spcPts val="800"/>
-              </a:spcAft>
-              <a:buNone/>
-            </a:pPr>
-            <a:r>
-              <a:rPr lang="en-US" sz="1800" b="1" dirty="0">
-                <a:solidFill>
-                  <a:srgbClr val="FE4447"/>
-                </a:solidFill>
-                <a:latin typeface="Georgia" pitchFamily="34" charset="0"/>
-                <a:ea typeface="Georgia" pitchFamily="34" charset="-122"/>
-                <a:cs typeface="Georgia" pitchFamily="34" charset="-120"/>
-              </a:rPr>
-              <a:t>Learning objective</a:t>
-            </a:r>
-            <a:endParaRPr lang="en-US" sz="1800" dirty="0"/>
-          </a:p>
-        </p:txBody>
-      </p:sp>
-      <p:sp>
-        <p:nvSpPr>
-          <p:cNvPr id="6" name="Text 4"/>
-          <p:cNvSpPr/>
-          <p:nvPr/>
-        </p:nvSpPr>
-        <p:spPr>
-          <a:xfrm>
-            <a:off x="406301" y="1637854"/>
-            <a:ext cx="8498026" cy="426541"/>
-          </a:xfrm>
-          <a:prstGeom prst="rect">
-            <a:avLst/>
-          </a:prstGeom>
-          <a:noFill/>
-          <a:ln/>
-        </p:spPr>
-        <p:txBody>
-          <a:bodyPr wrap="square" lIns="0" tIns="0" rIns="0" bIns="0" rtlCol="0" anchor="t"/>
-          <a:lstStyle/>
-          <a:p>
-            <a:pPr algn="l" indent="0" marL="0">
-              <a:lnSpc>
-                <a:spcPts val="1680"/>
-              </a:lnSpc>
-              <a:spcBef>
-                <a:spcPts val="300"/>
-              </a:spcBef>
-              <a:spcAft>
-                <a:spcPts val="300"/>
-              </a:spcAft>
-              <a:buNone/>
-            </a:pPr>
-            <a:r>
-              <a:rPr lang="en-US" sz="1200" dirty="0">
-                <a:solidFill>
-                  <a:srgbClr val="1C2833"/>
-                </a:solidFill>
-                <a:latin typeface="Arial" pitchFamily="34" charset="0"/>
-                <a:ea typeface="Arial" pitchFamily="34" charset="-122"/>
-                <a:cs typeface="Arial" pitchFamily="34" charset="-120"/>
-              </a:rPr>
-              <a:t>Students will explain, with a physical model, why the Moon appears to change shape over a ~29.5-day cycle, and will name the synodic month as the underlying period.</a:t>
-            </a:r>
-            <a:endParaRPr lang="en-US" sz="1200" dirty="0"/>
-          </a:p>
-        </p:txBody>
-      </p:sp>
-      <p:sp>
-        <p:nvSpPr>
-          <p:cNvPr id="7" name="Text 5"/>
-          <p:cNvSpPr/>
-          <p:nvPr/>
-        </p:nvSpPr>
-        <p:spPr>
-          <a:xfrm>
             <a:off x="406301" y="4434929"/>
             <a:ext cx="8498026" cy="213271"/>
           </a:xfrm>
@@ -2340,7 +2867,7 @@
                 <a:ea typeface="Georgia" pitchFamily="34" charset="-122"/>
                 <a:cs typeface="Georgia" pitchFamily="34" charset="-120"/>
               </a:rPr>
-              <a:t>Differentiation</a:t>
+              <a:t>Core (20 min) (cont.)</a:t>
             </a:r>
             <a:endParaRPr lang="en-US" sz="1800" dirty="0"/>
           </a:p>
@@ -2355,7 +2882,7 @@
         <p:spPr>
           <a:xfrm>
             <a:off x="634901" y="883593"/>
-            <a:ext cx="8102798" cy="937022"/>
+            <a:ext cx="8102798" cy="281880"/>
           </a:xfrm>
           <a:prstGeom prst="rect">
             <a:avLst/>
@@ -2386,70 +2913,133 @@
                 <a:ea typeface="Arial" pitchFamily="34" charset="-122"/>
                 <a:cs typeface="Arial" pitchFamily="34" charset="-120"/>
               </a:rPr>
-              <a:t>One tier up:</a:t>
-            </a:r>
-            <a:pPr algn="l" indent="0" marL="0">
-              <a:lnSpc>
-                <a:spcPts val="1620"/>
-              </a:lnSpc>
-              <a:spcAft>
-                <a:spcPts val="300"/>
-              </a:spcAft>
-              <a:buNone/>
-            </a:pPr>
-            <a:r>
-              <a:rPr lang="en-US" sz="1200" dirty="0">
-                <a:solidFill>
-                  <a:srgbClr val="1C2833"/>
-                </a:solidFill>
-                <a:latin typeface="Arial" pitchFamily="34" charset="0"/>
-                <a:ea typeface="Arial" pitchFamily="34" charset="-122"/>
-                <a:cs typeface="Arial" pitchFamily="34" charset="-120"/>
-              </a:rPr>
-              <a:t> Why is the synodic month (29.53 days) different from the </a:t>
-            </a:r>
-            <a:pPr algn="l" indent="0" marL="0">
-              <a:lnSpc>
-                <a:spcPts val="1620"/>
-              </a:lnSpc>
-              <a:spcAft>
-                <a:spcPts val="300"/>
-              </a:spcAft>
-              <a:buNone/>
-            </a:pPr>
-            <a:r>
-              <a:rPr lang="en-US" sz="1200" i="1" dirty="0">
-                <a:solidFill>
-                  <a:srgbClr val="1C2833"/>
-                </a:solidFill>
-                <a:latin typeface="Arial" pitchFamily="34" charset="0"/>
-                <a:ea typeface="Arial" pitchFamily="34" charset="-122"/>
-                <a:cs typeface="Arial" pitchFamily="34" charset="-120"/>
-              </a:rPr>
-              <a:t>sidereal</a:t>
-            </a:r>
-            <a:pPr algn="l" indent="0" marL="0">
-              <a:lnSpc>
-                <a:spcPts val="1620"/>
-              </a:lnSpc>
-              <a:spcAft>
-                <a:spcPts val="300"/>
-              </a:spcAft>
-              <a:buNone/>
-            </a:pPr>
-            <a:r>
-              <a:rPr lang="en-US" sz="1200" dirty="0">
-                <a:solidFill>
-                  <a:srgbClr val="1C2833"/>
-                </a:solidFill>
-                <a:latin typeface="Arial" pitchFamily="34" charset="0"/>
-                <a:ea typeface="Arial" pitchFamily="34" charset="-122"/>
-                <a:cs typeface="Arial" pitchFamily="34" charset="-120"/>
-              </a:rPr>
-              <a:t> month (27.32 days, the time for the Moon to return to the same star background)? Hint: Earth has moved around the Sun during the lunar month.</a:t>
+              <a:t>Key insight on the board:</a:t>
             </a:r>
             <a:endParaRPr lang="en-US" sz="1200" dirty="0"/>
           </a:p>
+        </p:txBody>
+      </p:sp>
+      <p:sp>
+        <p:nvSpPr>
+          <p:cNvPr id="5" name="Text 3"/>
+          <p:cNvSpPr/>
+          <p:nvPr/>
+        </p:nvSpPr>
+        <p:spPr>
+          <a:xfrm>
+            <a:off x="406301" y="1266974"/>
+            <a:ext cx="8331398" cy="611981"/>
+          </a:xfrm>
+          <a:prstGeom prst="rect">
+            <a:avLst/>
+          </a:prstGeom>
+          <a:solidFill>
+            <a:srgbClr val="F4F8F9"/>
+          </a:solidFill>
+          <a:ln/>
+        </p:spPr>
+        <p:txBody>
+          <a:bodyPr wrap="square" rtlCol="0" anchor="ctr"/>
+          <a:lstStyle/>
+          <a:p>
+            <a:pPr indent="0" marL="0">
+              <a:buNone/>
+            </a:pPr>
+            <a:endParaRPr lang="en-US" dirty="0"/>
+          </a:p>
+        </p:txBody>
+      </p:sp>
+      <p:sp>
+        <p:nvSpPr>
+          <p:cNvPr id="6" name="Shape 4"/>
+          <p:cNvSpPr/>
+          <p:nvPr/>
+        </p:nvSpPr>
+        <p:spPr>
+          <a:xfrm>
+            <a:off x="434876" y="1266974"/>
+            <a:ext cx="0" cy="611981"/>
+          </a:xfrm>
+          <a:prstGeom prst="line">
+            <a:avLst/>
+          </a:prstGeom>
+          <a:noFill/>
+          <a:ln w="57150">
+            <a:solidFill>
+              <a:srgbClr val="FE4447"/>
+            </a:solidFill>
+            <a:prstDash val="solid"/>
+          </a:ln>
+        </p:spPr>
+      </p:sp>
+      <p:sp>
+        <p:nvSpPr>
+          <p:cNvPr id="7" name="Text 5"/>
+          <p:cNvSpPr/>
+          <p:nvPr/>
+        </p:nvSpPr>
+        <p:spPr>
+          <a:xfrm>
+            <a:off x="692051" y="1457474"/>
+            <a:ext cx="7973389" cy="230981"/>
+          </a:xfrm>
+          <a:prstGeom prst="rect">
+            <a:avLst/>
+          </a:prstGeom>
+          <a:noFill/>
+          <a:ln/>
+        </p:spPr>
+        <p:txBody>
+          <a:bodyPr wrap="square" lIns="0" tIns="0" rIns="0" bIns="0" rtlCol="0" anchor="t"/>
+          <a:lstStyle/>
+          <a:p>
+            <a:pPr algn="l" indent="0" marL="0">
+              <a:lnSpc>
+                <a:spcPts val="1820"/>
+              </a:lnSpc>
+              <a:spcBef>
+                <a:spcPts val="300"/>
+              </a:spcBef>
+              <a:spcAft>
+                <a:spcPts val="300"/>
+              </a:spcAft>
+              <a:buNone/>
+            </a:pPr>
+            <a:r>
+              <a:rPr lang="en-US" sz="1300" b="1" i="1" dirty="0">
+                <a:solidFill>
+                  <a:srgbClr val="1C2833"/>
+                </a:solidFill>
+                <a:latin typeface="Georgia" pitchFamily="34" charset="0"/>
+                <a:ea typeface="Georgia" pitchFamily="34" charset="-122"/>
+                <a:cs typeface="Georgia" pitchFamily="34" charset="-120"/>
+              </a:rPr>
+              <a:t>The Moon doesn't change. The angle from which we see it changes.</a:t>
+            </a:r>
+            <a:endParaRPr lang="en-US" sz="1300" dirty="0"/>
+          </a:p>
+        </p:txBody>
+      </p:sp>
+      <p:sp>
+        <p:nvSpPr>
+          <p:cNvPr id="8" name="Text 6"/>
+          <p:cNvSpPr/>
+          <p:nvPr/>
+        </p:nvSpPr>
+        <p:spPr>
+          <a:xfrm>
+            <a:off x="634901" y="1980456"/>
+            <a:ext cx="8102798" cy="487561"/>
+          </a:xfrm>
+          <a:prstGeom prst="rect">
+            <a:avLst/>
+          </a:prstGeom>
+          <a:noFill/>
+          <a:ln/>
+        </p:spPr>
+        <p:txBody>
+          <a:bodyPr wrap="square" lIns="0" tIns="0" rIns="0" bIns="0" rtlCol="0" anchor="t"/>
+          <a:lstStyle/>
           <a:p>
             <a:pPr algn="l" marL="342900" indent="-342900">
               <a:lnSpc>
@@ -2470,7 +3060,7 @@
                 <a:ea typeface="Arial" pitchFamily="34" charset="-122"/>
                 <a:cs typeface="Arial" pitchFamily="34" charset="-120"/>
               </a:rPr>
-              <a:t>One tier down:</a:t>
+              <a:t>The cycle takes ~29.5 days.</a:t>
             </a:r>
             <a:pPr algn="l" indent="0" marL="0">
               <a:lnSpc>
@@ -2490,7 +3080,47 @@
                 <a:ea typeface="Arial" pitchFamily="34" charset="-122"/>
                 <a:cs typeface="Arial" pitchFamily="34" charset="-120"/>
               </a:rPr>
-              <a:t> Skip the 8-position drill. Focus on 4: new, half (waxing), full, half (waning). Build the rest later in the week.</a:t>
+              <a:t> This is the </a:t>
+            </a:r>
+            <a:pPr algn="l" indent="0" marL="0">
+              <a:lnSpc>
+                <a:spcPts val="1620"/>
+              </a:lnSpc>
+              <a:spcAft>
+                <a:spcPts val="300"/>
+              </a:spcAft>
+              <a:buNone/>
+            </a:pPr>
+            <a:r>
+              <a:rPr lang="en-US" sz="1200" b="1" dirty="0">
+                <a:solidFill>
+                  <a:srgbClr val="1C2833"/>
+                </a:solidFill>
+                <a:latin typeface="Arial" pitchFamily="34" charset="0"/>
+                <a:ea typeface="Arial" pitchFamily="34" charset="-122"/>
+                <a:cs typeface="Arial" pitchFamily="34" charset="-120"/>
+              </a:rPr>
+              <a:t>synodic month</a:t>
+            </a:r>
+            <a:pPr algn="l" indent="0" marL="0">
+              <a:lnSpc>
+                <a:spcPts val="1620"/>
+              </a:lnSpc>
+              <a:spcAft>
+                <a:spcPts val="300"/>
+              </a:spcAft>
+              <a:buNone/>
+            </a:pPr>
+            <a:r>
+              <a:rPr lang="en-US" sz="1200" dirty="0">
+                <a:solidFill>
+                  <a:srgbClr val="1C2833"/>
+                </a:solidFill>
+                <a:latin typeface="Arial" pitchFamily="34" charset="0"/>
+                <a:ea typeface="Arial" pitchFamily="34" charset="-122"/>
+                <a:cs typeface="Arial" pitchFamily="34" charset="-120"/>
+              </a:rPr>
+              <a:t> — the time from one new moon to the next. Write the number 29.53 on the board.</a:t>
             </a:r>
             <a:endParaRPr lang="en-US" sz="1200" dirty="0"/>
           </a:p>
@@ -2498,7 +3128,7 @@
       </p:sp>
       <p:sp>
         <p:nvSpPr>
-          <p:cNvPr id="5" name="Text 3"/>
+          <p:cNvPr id="9" name="Text 7"/>
           <p:cNvSpPr/>
           <p:nvPr/>
         </p:nvSpPr>
@@ -2648,7 +3278,7 @@
                 <a:ea typeface="Georgia" pitchFamily="34" charset="-122"/>
                 <a:cs typeface="Georgia" pitchFamily="34" charset="-120"/>
               </a:rPr>
-              <a:t>Teacher notes</a:t>
+              <a:t>Core (20 min) (cont.)</a:t>
             </a:r>
             <a:endParaRPr lang="en-US" sz="1800" dirty="0"/>
           </a:p>
@@ -2662,8 +3292,8 @@
         </p:nvSpPr>
         <p:spPr>
           <a:xfrm>
-            <a:off x="406301" y="870942"/>
-            <a:ext cx="8498026" cy="1066354"/>
+            <a:off x="634901" y="883593"/>
+            <a:ext cx="8102798" cy="693241"/>
           </a:xfrm>
           <a:prstGeom prst="rect">
             <a:avLst/>
@@ -2675,13 +3305,31 @@
           <a:bodyPr wrap="square" lIns="0" tIns="0" rIns="0" bIns="0" rtlCol="0" anchor="t"/>
           <a:lstStyle/>
           <a:p>
-            <a:pPr algn="l" indent="0" marL="0">
-              <a:lnSpc>
-                <a:spcPts val="1680"/>
-              </a:lnSpc>
-              <a:spcBef>
-                <a:spcPts val="300"/>
-              </a:spcBef>
+            <a:pPr algn="l" marL="342900" indent="-342900">
+              <a:lnSpc>
+                <a:spcPts val="1620"/>
+              </a:lnSpc>
+              <a:spcAft>
+                <a:spcPts val="300"/>
+              </a:spcAft>
+              <a:buSzPct val="100000"/>
+              <a:buChar char="•"/>
+            </a:pPr>
+            <a:r>
+              <a:rPr lang="en-US" sz="1200" b="1" dirty="0">
+                <a:solidFill>
+                  <a:srgbClr val="1C2833"/>
+                </a:solidFill>
+                <a:latin typeface="Arial" pitchFamily="34" charset="0"/>
+                <a:ea typeface="Arial" pitchFamily="34" charset="-122"/>
+                <a:cs typeface="Arial" pitchFamily="34" charset="-120"/>
+              </a:rPr>
+              <a:t>One question to plant:</a:t>
+            </a:r>
+            <a:pPr algn="l" indent="0" marL="0">
+              <a:lnSpc>
+                <a:spcPts val="1620"/>
+              </a:lnSpc>
               <a:spcAft>
                 <a:spcPts val="300"/>
               </a:spcAft>
@@ -2696,7 +3344,47 @@
                 <a:ea typeface="Arial" pitchFamily="34" charset="-122"/>
                 <a:cs typeface="Arial" pitchFamily="34" charset="-120"/>
               </a:rPr>
-              <a:t>– Some students will say "the Moon makes its own light." It does not — it reflects sunlight. Show them this physically by switching the torch off in the demo. The ball goes dark. – Some will say "the Moon's far side is permanently dark." It is not. The Moon's far side gets just as much sunlight as the near side, on average — we just never see the far side from Earth because the Moon is tidally locked (the same face always faces us). – For the diary, if students live in a heavily light-polluted city, the thin crescents may be hard to spot in twilight. They can use an app for verification — that's acceptable.</a:t>
+              <a:t> </a:t>
+            </a:r>
+            <a:pPr algn="l" indent="0" marL="0">
+              <a:lnSpc>
+                <a:spcPts val="1620"/>
+              </a:lnSpc>
+              <a:spcAft>
+                <a:spcPts val="300"/>
+              </a:spcAft>
+              <a:buNone/>
+            </a:pPr>
+            <a:r>
+              <a:rPr lang="en-US" sz="1200" i="1" dirty="0">
+                <a:solidFill>
+                  <a:srgbClr val="1C2833"/>
+                </a:solidFill>
+                <a:latin typeface="Arial" pitchFamily="34" charset="0"/>
+                <a:ea typeface="Arial" pitchFamily="34" charset="-122"/>
+                <a:cs typeface="Arial" pitchFamily="34" charset="-120"/>
+              </a:rPr>
+              <a:t>"Earth orbits the Sun in 365 days. The Moon orbits Earth in 29.5 days. Is the lunar 'month' the same as a calendar month?"</a:t>
+            </a:r>
+            <a:pPr algn="l" indent="0" marL="0">
+              <a:lnSpc>
+                <a:spcPts val="1620"/>
+              </a:lnSpc>
+              <a:spcAft>
+                <a:spcPts val="300"/>
+              </a:spcAft>
+              <a:buNone/>
+            </a:pPr>
+            <a:r>
+              <a:rPr lang="en-US" sz="1200" dirty="0">
+                <a:solidFill>
+                  <a:srgbClr val="1C2833"/>
+                </a:solidFill>
+                <a:latin typeface="Arial" pitchFamily="34" charset="0"/>
+                <a:ea typeface="Arial" pitchFamily="34" charset="-122"/>
+                <a:cs typeface="Arial" pitchFamily="34" charset="-120"/>
+              </a:rPr>
+              <a:t> (No — and that's why we have leap years for the solar calendar, and a fancier system for the lunar one. We'll get to that on Day 5.)</a:t>
             </a:r>
             <a:endParaRPr lang="en-US" sz="1200" dirty="0"/>
           </a:p>
@@ -2854,7 +3542,7 @@
                 <a:ea typeface="Georgia" pitchFamily="34" charset="-122"/>
                 <a:cs typeface="Georgia" pitchFamily="34" charset="-120"/>
               </a:rPr>
-              <a:t>Citation(s) used in this lesson</a:t>
+              <a:t>Activity (15 min) — Pair sketching</a:t>
             </a:r>
             <a:endParaRPr lang="en-US" sz="1800" dirty="0"/>
           </a:p>
@@ -2902,7 +3590,2160 @@
                 <a:ea typeface="Arial" pitchFamily="34" charset="-122"/>
                 <a:cs typeface="Arial" pitchFamily="34" charset="-120"/>
               </a:rPr>
-              <a:t>– General reference: NCERT Science Class 6, Chapter 17 ("Stars and the Solar System"). No verse citation today.</a:t>
+              <a:t>In pairs:</a:t>
+            </a:r>
+            <a:endParaRPr lang="en-US" sz="1200" dirty="0"/>
+          </a:p>
+        </p:txBody>
+      </p:sp>
+      <p:sp>
+        <p:nvSpPr>
+          <p:cNvPr id="5" name="Text 3"/>
+          <p:cNvSpPr/>
+          <p:nvPr/>
+        </p:nvSpPr>
+        <p:spPr>
+          <a:xfrm>
+            <a:off x="634901" y="1173063"/>
+            <a:ext cx="8102798" cy="1013222"/>
+          </a:xfrm>
+          <a:prstGeom prst="rect">
+            <a:avLst/>
+          </a:prstGeom>
+          <a:noFill/>
+          <a:ln/>
+        </p:spPr>
+        <p:txBody>
+          <a:bodyPr wrap="square" lIns="0" tIns="0" rIns="0" bIns="0" rtlCol="0" anchor="t"/>
+          <a:lstStyle/>
+          <a:p>
+            <a:pPr algn="l" marL="342900" indent="-342900">
+              <a:lnSpc>
+                <a:spcPts val="1620"/>
+              </a:lnSpc>
+              <a:spcAft>
+                <a:spcPts val="300"/>
+              </a:spcAft>
+              <a:buSzPct val="100000"/>
+              <a:buChar char="•"/>
+            </a:pPr>
+            <a:r>
+              <a:rPr lang="en-US" sz="1200" dirty="0">
+                <a:solidFill>
+                  <a:srgbClr val="1C2833"/>
+                </a:solidFill>
+                <a:latin typeface="Arial" pitchFamily="34" charset="0"/>
+                <a:ea typeface="Arial" pitchFamily="34" charset="-122"/>
+                <a:cs typeface="Arial" pitchFamily="34" charset="-120"/>
+              </a:rPr>
+              <a:t>One partner is "Sun" (holds an imaginary torch in one direction).</a:t>
+            </a:r>
+            <a:endParaRPr lang="en-US" sz="1200" dirty="0"/>
+          </a:p>
+          <a:p>
+            <a:pPr algn="l" marL="342900" indent="-342900">
+              <a:lnSpc>
+                <a:spcPts val="1620"/>
+              </a:lnSpc>
+              <a:spcAft>
+                <a:spcPts val="300"/>
+              </a:spcAft>
+              <a:buSzPct val="100000"/>
+              <a:buChar char="•"/>
+            </a:pPr>
+            <a:r>
+              <a:rPr lang="en-US" sz="1200" dirty="0">
+                <a:solidFill>
+                  <a:srgbClr val="1C2833"/>
+                </a:solidFill>
+                <a:latin typeface="Arial" pitchFamily="34" charset="0"/>
+                <a:ea typeface="Arial" pitchFamily="34" charset="-122"/>
+                <a:cs typeface="Arial" pitchFamily="34" charset="-120"/>
+              </a:rPr>
+              <a:t>The other is "Earth" (stays still).</a:t>
+            </a:r>
+            <a:endParaRPr lang="en-US" sz="1200" dirty="0"/>
+          </a:p>
+          <a:p>
+            <a:pPr algn="l" marL="342900" indent="-342900">
+              <a:lnSpc>
+                <a:spcPts val="1620"/>
+              </a:lnSpc>
+              <a:spcAft>
+                <a:spcPts val="300"/>
+              </a:spcAft>
+              <a:buSzPct val="100000"/>
+              <a:buChar char="•"/>
+            </a:pPr>
+            <a:r>
+              <a:rPr lang="en-US" sz="1200" dirty="0">
+                <a:solidFill>
+                  <a:srgbClr val="1C2833"/>
+                </a:solidFill>
+                <a:latin typeface="Arial" pitchFamily="34" charset="0"/>
+                <a:ea typeface="Arial" pitchFamily="34" charset="-122"/>
+                <a:cs typeface="Arial" pitchFamily="34" charset="-120"/>
+              </a:rPr>
+              <a:t>Take a small ball or a balled-up paper and walk it around Earth in 8 stopping positions.</a:t>
+            </a:r>
+            <a:endParaRPr lang="en-US" sz="1200" dirty="0"/>
+          </a:p>
+          <a:p>
+            <a:pPr algn="l" marL="342900" indent="-342900">
+              <a:lnSpc>
+                <a:spcPts val="1620"/>
+              </a:lnSpc>
+              <a:spcAft>
+                <a:spcPts val="300"/>
+              </a:spcAft>
+              <a:buSzPct val="100000"/>
+              <a:buChar char="•"/>
+            </a:pPr>
+            <a:r>
+              <a:rPr lang="en-US" sz="1200" dirty="0">
+                <a:solidFill>
+                  <a:srgbClr val="1C2833"/>
+                </a:solidFill>
+                <a:latin typeface="Arial" pitchFamily="34" charset="0"/>
+                <a:ea typeface="Arial" pitchFamily="34" charset="-122"/>
+                <a:cs typeface="Arial" pitchFamily="34" charset="-120"/>
+              </a:rPr>
+              <a:t>At each position, the Earth-partner sketches what shape they see in their notebook.</a:t>
+            </a:r>
+            <a:endParaRPr lang="en-US" sz="1200" dirty="0"/>
+          </a:p>
+        </p:txBody>
+      </p:sp>
+      <p:sp>
+        <p:nvSpPr>
+          <p:cNvPr id="6" name="Text 4"/>
+          <p:cNvSpPr/>
+          <p:nvPr/>
+        </p:nvSpPr>
+        <p:spPr>
+          <a:xfrm>
+            <a:off x="406301" y="4434929"/>
+            <a:ext cx="8498026" cy="213271"/>
+          </a:xfrm>
+          <a:prstGeom prst="rect">
+            <a:avLst/>
+          </a:prstGeom>
+          <a:noFill/>
+          <a:ln/>
+        </p:spPr>
+        <p:txBody>
+          <a:bodyPr wrap="square" lIns="0" tIns="0" rIns="0" bIns="0" rtlCol="0" anchor="t"/>
+          <a:lstStyle/>
+          <a:p>
+            <a:pPr algn="l" indent="0" marL="0">
+              <a:lnSpc>
+                <a:spcPts val="1680"/>
+              </a:lnSpc>
+              <a:spcBef>
+                <a:spcPts val="300"/>
+              </a:spcBef>
+              <a:spcAft>
+                <a:spcPts val="300"/>
+              </a:spcAft>
+              <a:buNone/>
+            </a:pPr>
+            <a:r>
+              <a:rPr lang="en-US" sz="1200" dirty="0">
+                <a:solidFill>
+                  <a:srgbClr val="1C2833"/>
+                </a:solidFill>
+                <a:latin typeface="Arial" pitchFamily="34" charset="0"/>
+                <a:ea typeface="Arial" pitchFamily="34" charset="-122"/>
+                <a:cs typeface="Arial" pitchFamily="34" charset="-120"/>
+              </a:rPr>
+              <a:t>Middle ·  · IKS Curriculum</a:t>
+            </a:r>
+            <a:endParaRPr lang="en-US" sz="1200" dirty="0"/>
+          </a:p>
+        </p:txBody>
+      </p:sp>
+    </p:spTree>
+  </p:cSld>
+  <p:clrMapOvr>
+    <a:masterClrMapping/>
+  </p:clrMapOvr>
+</p:sld>
+</file>
+
+<file path=ppt/slides/slide13.xml><?xml version="1.0" encoding="utf-8"?>
+<p:sld xmlns:a="http://schemas.openxmlformats.org/drawingml/2006/main" xmlns:r="http://schemas.openxmlformats.org/officeDocument/2006/relationships" xmlns:p="http://schemas.openxmlformats.org/presentationml/2006/main">
+  <p:cSld name="Slide 13">
+    <p:bg>
+      <p:bgPr>
+        <a:solidFill>
+          <a:srgbClr val="FFFFFF"/>
+        </a:solidFill>
+      </p:bgPr>
+    </p:bg>
+    <p:spTree>
+      <p:nvGrpSpPr>
+        <p:cNvPr id="1" name=""/>
+        <p:cNvGrpSpPr/>
+        <p:nvPr/>
+      </p:nvGrpSpPr>
+      <p:grpSpPr>
+        <a:xfrm>
+          <a:off x="0" y="0"/>
+          <a:ext cx="0" cy="0"/>
+          <a:chOff x="0" y="0"/>
+          <a:chExt cx="0" cy="0"/>
+        </a:xfrm>
+      </p:grpSpPr>
+      <p:sp>
+        <p:nvSpPr>
+          <p:cNvPr id="2" name="Text 0"/>
+          <p:cNvSpPr/>
+          <p:nvPr/>
+        </p:nvSpPr>
+        <p:spPr>
+          <a:xfrm>
+            <a:off x="0" y="0"/>
+            <a:ext cx="9144000" cy="101501"/>
+          </a:xfrm>
+          <a:prstGeom prst="rect">
+            <a:avLst/>
+          </a:prstGeom>
+          <a:solidFill>
+            <a:srgbClr val="277884"/>
+          </a:solidFill>
+          <a:ln/>
+        </p:spPr>
+        <p:txBody>
+          <a:bodyPr wrap="square" rtlCol="0" anchor="ctr"/>
+          <a:lstStyle/>
+          <a:p>
+            <a:pPr indent="0" marL="0">
+              <a:buNone/>
+            </a:pPr>
+            <a:endParaRPr lang="en-US" dirty="0"/>
+          </a:p>
+        </p:txBody>
+      </p:sp>
+      <p:sp>
+        <p:nvSpPr>
+          <p:cNvPr id="3" name="Text 1"/>
+          <p:cNvSpPr/>
+          <p:nvPr/>
+        </p:nvSpPr>
+        <p:spPr>
+          <a:xfrm>
+            <a:off x="406301" y="457051"/>
+            <a:ext cx="8498026" cy="274290"/>
+          </a:xfrm>
+          <a:prstGeom prst="rect">
+            <a:avLst/>
+          </a:prstGeom>
+          <a:noFill/>
+          <a:ln/>
+        </p:spPr>
+        <p:txBody>
+          <a:bodyPr wrap="square" lIns="0" tIns="0" rIns="0" bIns="0" rtlCol="0" anchor="t"/>
+          <a:lstStyle/>
+          <a:p>
+            <a:pPr algn="l" indent="0" marL="0">
+              <a:lnSpc>
+                <a:spcPts val="2160"/>
+              </a:lnSpc>
+              <a:spcBef>
+                <a:spcPts val="600"/>
+              </a:spcBef>
+              <a:spcAft>
+                <a:spcPts val="800"/>
+              </a:spcAft>
+              <a:buNone/>
+            </a:pPr>
+            <a:r>
+              <a:rPr lang="en-US" sz="1800" b="1" dirty="0">
+                <a:solidFill>
+                  <a:srgbClr val="FE4447"/>
+                </a:solidFill>
+                <a:latin typeface="Georgia" pitchFamily="34" charset="0"/>
+                <a:ea typeface="Georgia" pitchFamily="34" charset="-122"/>
+                <a:cs typeface="Georgia" pitchFamily="34" charset="-120"/>
+              </a:rPr>
+              <a:t>Activity (15 min) — Pair sketching (cont.)</a:t>
+            </a:r>
+            <a:endParaRPr lang="en-US" sz="1800" dirty="0"/>
+          </a:p>
+        </p:txBody>
+      </p:sp>
+      <p:sp>
+        <p:nvSpPr>
+          <p:cNvPr id="4" name="Text 2"/>
+          <p:cNvSpPr/>
+          <p:nvPr/>
+        </p:nvSpPr>
+        <p:spPr>
+          <a:xfrm>
+            <a:off x="406301" y="870942"/>
+            <a:ext cx="8498026" cy="213271"/>
+          </a:xfrm>
+          <a:prstGeom prst="rect">
+            <a:avLst/>
+          </a:prstGeom>
+          <a:noFill/>
+          <a:ln/>
+        </p:spPr>
+        <p:txBody>
+          <a:bodyPr wrap="square" lIns="0" tIns="0" rIns="0" bIns="0" rtlCol="0" anchor="t"/>
+          <a:lstStyle/>
+          <a:p>
+            <a:pPr algn="l" indent="0" marL="0">
+              <a:lnSpc>
+                <a:spcPts val="1680"/>
+              </a:lnSpc>
+              <a:spcBef>
+                <a:spcPts val="300"/>
+              </a:spcBef>
+              <a:spcAft>
+                <a:spcPts val="300"/>
+              </a:spcAft>
+              <a:buNone/>
+            </a:pPr>
+            <a:r>
+              <a:rPr lang="en-US" sz="1200" dirty="0">
+                <a:solidFill>
+                  <a:srgbClr val="1C2833"/>
+                </a:solidFill>
+                <a:latin typeface="Arial" pitchFamily="34" charset="0"/>
+                <a:ea typeface="Arial" pitchFamily="34" charset="-122"/>
+                <a:cs typeface="Arial" pitchFamily="34" charset="-120"/>
+              </a:rPr>
+              <a:t>After 7 minutes, swap roles.</a:t>
+            </a:r>
+            <a:endParaRPr lang="en-US" sz="1200" dirty="0"/>
+          </a:p>
+        </p:txBody>
+      </p:sp>
+      <p:sp>
+        <p:nvSpPr>
+          <p:cNvPr id="5" name="Text 3"/>
+          <p:cNvSpPr/>
+          <p:nvPr/>
+        </p:nvSpPr>
+        <p:spPr>
+          <a:xfrm>
+            <a:off x="406301" y="1160413"/>
+            <a:ext cx="8498026" cy="426541"/>
+          </a:xfrm>
+          <a:prstGeom prst="rect">
+            <a:avLst/>
+          </a:prstGeom>
+          <a:noFill/>
+          <a:ln/>
+        </p:spPr>
+        <p:txBody>
+          <a:bodyPr wrap="square" lIns="0" tIns="0" rIns="0" bIns="0" rtlCol="0" anchor="t"/>
+          <a:lstStyle/>
+          <a:p>
+            <a:pPr algn="l" indent="0" marL="0">
+              <a:lnSpc>
+                <a:spcPts val="1680"/>
+              </a:lnSpc>
+              <a:spcBef>
+                <a:spcPts val="300"/>
+              </a:spcBef>
+              <a:spcAft>
+                <a:spcPts val="300"/>
+              </a:spcAft>
+              <a:buNone/>
+            </a:pPr>
+            <a:r>
+              <a:rPr lang="en-US" sz="1200" dirty="0">
+                <a:solidFill>
+                  <a:srgbClr val="1C2833"/>
+                </a:solidFill>
+                <a:latin typeface="Arial" pitchFamily="34" charset="0"/>
+                <a:ea typeface="Arial" pitchFamily="34" charset="-122"/>
+                <a:cs typeface="Arial" pitchFamily="34" charset="-120"/>
+              </a:rPr>
+              <a:t>By end of activity, each student has 8 small Moon-shape sketches in their notebook labelled new, waxing crescent, first quarter, waxing gibbous, full, waning gibbous, last quarter, waning crescent.</a:t>
+            </a:r>
+            <a:endParaRPr lang="en-US" sz="1200" dirty="0"/>
+          </a:p>
+        </p:txBody>
+      </p:sp>
+      <p:sp>
+        <p:nvSpPr>
+          <p:cNvPr id="6" name="Text 4"/>
+          <p:cNvSpPr/>
+          <p:nvPr/>
+        </p:nvSpPr>
+        <p:spPr>
+          <a:xfrm>
+            <a:off x="406301" y="4434929"/>
+            <a:ext cx="8498026" cy="213271"/>
+          </a:xfrm>
+          <a:prstGeom prst="rect">
+            <a:avLst/>
+          </a:prstGeom>
+          <a:noFill/>
+          <a:ln/>
+        </p:spPr>
+        <p:txBody>
+          <a:bodyPr wrap="square" lIns="0" tIns="0" rIns="0" bIns="0" rtlCol="0" anchor="t"/>
+          <a:lstStyle/>
+          <a:p>
+            <a:pPr algn="l" indent="0" marL="0">
+              <a:lnSpc>
+                <a:spcPts val="1680"/>
+              </a:lnSpc>
+              <a:spcBef>
+                <a:spcPts val="300"/>
+              </a:spcBef>
+              <a:spcAft>
+                <a:spcPts val="300"/>
+              </a:spcAft>
+              <a:buNone/>
+            </a:pPr>
+            <a:r>
+              <a:rPr lang="en-US" sz="1200" dirty="0">
+                <a:solidFill>
+                  <a:srgbClr val="1C2833"/>
+                </a:solidFill>
+                <a:latin typeface="Arial" pitchFamily="34" charset="0"/>
+                <a:ea typeface="Arial" pitchFamily="34" charset="-122"/>
+                <a:cs typeface="Arial" pitchFamily="34" charset="-120"/>
+              </a:rPr>
+              <a:t>Middle ·  · IKS Curriculum</a:t>
+            </a:r>
+            <a:endParaRPr lang="en-US" sz="1200" dirty="0"/>
+          </a:p>
+        </p:txBody>
+      </p:sp>
+    </p:spTree>
+  </p:cSld>
+  <p:clrMapOvr>
+    <a:masterClrMapping/>
+  </p:clrMapOvr>
+</p:sld>
+</file>
+
+<file path=ppt/slides/slide14.xml><?xml version="1.0" encoding="utf-8"?>
+<p:sld xmlns:a="http://schemas.openxmlformats.org/drawingml/2006/main" xmlns:r="http://schemas.openxmlformats.org/officeDocument/2006/relationships" xmlns:p="http://schemas.openxmlformats.org/presentationml/2006/main">
+  <p:cSld name="Slide 14">
+    <p:bg>
+      <p:bgPr>
+        <a:solidFill>
+          <a:srgbClr val="FFFFFF"/>
+        </a:solidFill>
+      </p:bgPr>
+    </p:bg>
+    <p:spTree>
+      <p:nvGrpSpPr>
+        <p:cNvPr id="1" name=""/>
+        <p:cNvGrpSpPr/>
+        <p:nvPr/>
+      </p:nvGrpSpPr>
+      <p:grpSpPr>
+        <a:xfrm>
+          <a:off x="0" y="0"/>
+          <a:ext cx="0" cy="0"/>
+          <a:chOff x="0" y="0"/>
+          <a:chExt cx="0" cy="0"/>
+        </a:xfrm>
+      </p:grpSpPr>
+      <p:sp>
+        <p:nvSpPr>
+          <p:cNvPr id="2" name="Text 0"/>
+          <p:cNvSpPr/>
+          <p:nvPr/>
+        </p:nvSpPr>
+        <p:spPr>
+          <a:xfrm>
+            <a:off x="0" y="0"/>
+            <a:ext cx="9144000" cy="101501"/>
+          </a:xfrm>
+          <a:prstGeom prst="rect">
+            <a:avLst/>
+          </a:prstGeom>
+          <a:solidFill>
+            <a:srgbClr val="277884"/>
+          </a:solidFill>
+          <a:ln/>
+        </p:spPr>
+        <p:txBody>
+          <a:bodyPr wrap="square" rtlCol="0" anchor="ctr"/>
+          <a:lstStyle/>
+          <a:p>
+            <a:pPr indent="0" marL="0">
+              <a:buNone/>
+            </a:pPr>
+            <a:endParaRPr lang="en-US" dirty="0"/>
+          </a:p>
+        </p:txBody>
+      </p:sp>
+      <p:sp>
+        <p:nvSpPr>
+          <p:cNvPr id="3" name="Text 1"/>
+          <p:cNvSpPr/>
+          <p:nvPr/>
+        </p:nvSpPr>
+        <p:spPr>
+          <a:xfrm>
+            <a:off x="406301" y="457051"/>
+            <a:ext cx="8498026" cy="274290"/>
+          </a:xfrm>
+          <a:prstGeom prst="rect">
+            <a:avLst/>
+          </a:prstGeom>
+          <a:noFill/>
+          <a:ln/>
+        </p:spPr>
+        <p:txBody>
+          <a:bodyPr wrap="square" lIns="0" tIns="0" rIns="0" bIns="0" rtlCol="0" anchor="t"/>
+          <a:lstStyle/>
+          <a:p>
+            <a:pPr algn="l" indent="0" marL="0">
+              <a:lnSpc>
+                <a:spcPts val="2160"/>
+              </a:lnSpc>
+              <a:spcBef>
+                <a:spcPts val="600"/>
+              </a:spcBef>
+              <a:spcAft>
+                <a:spcPts val="800"/>
+              </a:spcAft>
+              <a:buNone/>
+            </a:pPr>
+            <a:r>
+              <a:rPr lang="en-US" sz="1800" b="1" dirty="0">
+                <a:solidFill>
+                  <a:srgbClr val="FE4447"/>
+                </a:solidFill>
+                <a:latin typeface="Georgia" pitchFamily="34" charset="0"/>
+                <a:ea typeface="Georgia" pitchFamily="34" charset="-122"/>
+                <a:cs typeface="Georgia" pitchFamily="34" charset="-120"/>
+              </a:rPr>
+              <a:t>Wrap-up (5 min)</a:t>
+            </a:r>
+            <a:endParaRPr lang="en-US" sz="1800" dirty="0"/>
+          </a:p>
+        </p:txBody>
+      </p:sp>
+      <p:sp>
+        <p:nvSpPr>
+          <p:cNvPr id="4" name="Text 2"/>
+          <p:cNvSpPr/>
+          <p:nvPr/>
+        </p:nvSpPr>
+        <p:spPr>
+          <a:xfrm>
+            <a:off x="634901" y="883593"/>
+            <a:ext cx="8102798" cy="1180802"/>
+          </a:xfrm>
+          <a:prstGeom prst="rect">
+            <a:avLst/>
+          </a:prstGeom>
+          <a:noFill/>
+          <a:ln/>
+        </p:spPr>
+        <p:txBody>
+          <a:bodyPr wrap="square" lIns="0" tIns="0" rIns="0" bIns="0" rtlCol="0" anchor="t"/>
+          <a:lstStyle/>
+          <a:p>
+            <a:pPr algn="l" marL="342900" indent="-342900">
+              <a:lnSpc>
+                <a:spcPts val="1620"/>
+              </a:lnSpc>
+              <a:spcAft>
+                <a:spcPts val="300"/>
+              </a:spcAft>
+              <a:buSzPct val="100000"/>
+              <a:buChar char="•"/>
+            </a:pPr>
+            <a:r>
+              <a:rPr lang="en-US" sz="1200" b="1" dirty="0">
+                <a:solidFill>
+                  <a:srgbClr val="1C2833"/>
+                </a:solidFill>
+                <a:latin typeface="Arial" pitchFamily="34" charset="0"/>
+                <a:ea typeface="Arial" pitchFamily="34" charset="-122"/>
+                <a:cs typeface="Arial" pitchFamily="34" charset="-120"/>
+              </a:rPr>
+              <a:t>Exit ticket on a slip of paper, 2 min:</a:t>
+            </a:r>
+            <a:pPr algn="l" indent="0" marL="0">
+              <a:lnSpc>
+                <a:spcPts val="1620"/>
+              </a:lnSpc>
+              <a:spcAft>
+                <a:spcPts val="300"/>
+              </a:spcAft>
+              <a:buNone/>
+            </a:pPr>
+            <a:r>
+              <a:rPr lang="en-US" sz="1200" dirty="0">
+                <a:solidFill>
+                  <a:srgbClr val="1C2833"/>
+                </a:solidFill>
+                <a:latin typeface="Arial" pitchFamily="34" charset="0"/>
+                <a:ea typeface="Arial" pitchFamily="34" charset="-122"/>
+                <a:cs typeface="Arial" pitchFamily="34" charset="-120"/>
+              </a:rPr>
+              <a:t> </a:t>
+            </a:r>
+            <a:pPr algn="l" indent="0" marL="0">
+              <a:lnSpc>
+                <a:spcPts val="1620"/>
+              </a:lnSpc>
+              <a:spcAft>
+                <a:spcPts val="300"/>
+              </a:spcAft>
+              <a:buNone/>
+            </a:pPr>
+            <a:r>
+              <a:rPr lang="en-US" sz="1200" i="1" dirty="0">
+                <a:solidFill>
+                  <a:srgbClr val="1C2833"/>
+                </a:solidFill>
+                <a:latin typeface="Arial" pitchFamily="34" charset="0"/>
+                <a:ea typeface="Arial" pitchFamily="34" charset="-122"/>
+                <a:cs typeface="Arial" pitchFamily="34" charset="-120"/>
+              </a:rPr>
+              <a:t>"In one sentence: why does the Moon look different on different nights?"</a:t>
+            </a:r>
+            <a:endParaRPr lang="en-US" sz="1200" dirty="0"/>
+          </a:p>
+          <a:p>
+            <a:pPr algn="l" marL="342900" indent="-342900">
+              <a:lnSpc>
+                <a:spcPts val="1620"/>
+              </a:lnSpc>
+              <a:spcAft>
+                <a:spcPts val="300"/>
+              </a:spcAft>
+              <a:buSzPct val="100000"/>
+              <a:buChar char="•"/>
+            </a:pPr>
+            <a:r>
+              <a:rPr lang="en-US" sz="1200" dirty="0">
+                <a:solidFill>
+                  <a:srgbClr val="1C2833"/>
+                </a:solidFill>
+                <a:latin typeface="Arial" pitchFamily="34" charset="0"/>
+                <a:ea typeface="Arial" pitchFamily="34" charset="-122"/>
+                <a:cs typeface="Arial" pitchFamily="34" charset="-120"/>
+              </a:rPr>
+              <a:t>Collect. Read 3 aloud quickly. Correct any "Earth's shadow makes the phases" answers gently — Earth's shadow only matters for </a:t>
+            </a:r>
+            <a:pPr algn="l" indent="0" marL="0">
+              <a:lnSpc>
+                <a:spcPts val="1620"/>
+              </a:lnSpc>
+              <a:spcAft>
+                <a:spcPts val="300"/>
+              </a:spcAft>
+              <a:buNone/>
+            </a:pPr>
+            <a:r>
+              <a:rPr lang="en-US" sz="1200" i="1" dirty="0">
+                <a:solidFill>
+                  <a:srgbClr val="1C2833"/>
+                </a:solidFill>
+                <a:latin typeface="Arial" pitchFamily="34" charset="0"/>
+                <a:ea typeface="Arial" pitchFamily="34" charset="-122"/>
+                <a:cs typeface="Arial" pitchFamily="34" charset="-120"/>
+              </a:rPr>
+              <a:t>eclipses</a:t>
+            </a:r>
+            <a:pPr algn="l" indent="0" marL="0">
+              <a:lnSpc>
+                <a:spcPts val="1620"/>
+              </a:lnSpc>
+              <a:spcAft>
+                <a:spcPts val="300"/>
+              </a:spcAft>
+              <a:buNone/>
+            </a:pPr>
+            <a:r>
+              <a:rPr lang="en-US" sz="1200" dirty="0">
+                <a:solidFill>
+                  <a:srgbClr val="1C2833"/>
+                </a:solidFill>
+                <a:latin typeface="Arial" pitchFamily="34" charset="0"/>
+                <a:ea typeface="Arial" pitchFamily="34" charset="-122"/>
+                <a:cs typeface="Arial" pitchFamily="34" charset="-120"/>
+              </a:rPr>
+              <a:t> (Day 7).</a:t>
+            </a:r>
+            <a:endParaRPr lang="en-US" sz="1200" dirty="0"/>
+          </a:p>
+          <a:p>
+            <a:pPr algn="l" marL="342900" indent="-342900">
+              <a:lnSpc>
+                <a:spcPts val="1620"/>
+              </a:lnSpc>
+              <a:spcAft>
+                <a:spcPts val="300"/>
+              </a:spcAft>
+              <a:buSzPct val="100000"/>
+              <a:buChar char="•"/>
+            </a:pPr>
+            <a:r>
+              <a:rPr lang="en-US" sz="1200" b="1" dirty="0">
+                <a:solidFill>
+                  <a:srgbClr val="1C2833"/>
+                </a:solidFill>
+                <a:latin typeface="Arial" pitchFamily="34" charset="0"/>
+                <a:ea typeface="Arial" pitchFamily="34" charset="-122"/>
+                <a:cs typeface="Arial" pitchFamily="34" charset="-120"/>
+              </a:rPr>
+              <a:t>Tonight's homework:</a:t>
+            </a:r>
+            <a:pPr algn="l" indent="0" marL="0">
+              <a:lnSpc>
+                <a:spcPts val="1620"/>
+              </a:lnSpc>
+              <a:spcAft>
+                <a:spcPts val="300"/>
+              </a:spcAft>
+              <a:buNone/>
+            </a:pPr>
+            <a:r>
+              <a:rPr lang="en-US" sz="1200" dirty="0">
+                <a:solidFill>
+                  <a:srgbClr val="1C2833"/>
+                </a:solidFill>
+                <a:latin typeface="Arial" pitchFamily="34" charset="0"/>
+                <a:ea typeface="Arial" pitchFamily="34" charset="-122"/>
+                <a:cs typeface="Arial" pitchFamily="34" charset="-120"/>
+              </a:rPr>
+              <a:t> Look at the Moon. Note the date, the time, the shape (sketch). Write down the cloud condition. This starts your </a:t>
+            </a:r>
+            <a:pPr algn="l" indent="0" marL="0">
+              <a:lnSpc>
+                <a:spcPts val="1620"/>
+              </a:lnSpc>
+              <a:spcAft>
+                <a:spcPts val="300"/>
+              </a:spcAft>
+              <a:buNone/>
+            </a:pPr>
+            <a:r>
+              <a:rPr lang="en-US" sz="1200" b="1" dirty="0">
+                <a:solidFill>
+                  <a:srgbClr val="1C2833"/>
+                </a:solidFill>
+                <a:latin typeface="Arial" pitchFamily="34" charset="0"/>
+                <a:ea typeface="Arial" pitchFamily="34" charset="-122"/>
+                <a:cs typeface="Arial" pitchFamily="34" charset="-120"/>
+              </a:rPr>
+              <a:t>10-night Moon diary</a:t>
+            </a:r>
+            <a:pPr algn="l" indent="0" marL="0">
+              <a:lnSpc>
+                <a:spcPts val="1620"/>
+              </a:lnSpc>
+              <a:spcAft>
+                <a:spcPts val="300"/>
+              </a:spcAft>
+              <a:buNone/>
+            </a:pPr>
+            <a:r>
+              <a:rPr lang="en-US" sz="1200" dirty="0">
+                <a:solidFill>
+                  <a:srgbClr val="1C2833"/>
+                </a:solidFill>
+                <a:latin typeface="Arial" pitchFamily="34" charset="0"/>
+                <a:ea typeface="Arial" pitchFamily="34" charset="-122"/>
+                <a:cs typeface="Arial" pitchFamily="34" charset="-120"/>
+              </a:rPr>
+              <a:t>.</a:t>
+            </a:r>
+            <a:endParaRPr lang="en-US" sz="1200" dirty="0"/>
+          </a:p>
+        </p:txBody>
+      </p:sp>
+      <p:sp>
+        <p:nvSpPr>
+          <p:cNvPr id="5" name="Text 3"/>
+          <p:cNvSpPr/>
+          <p:nvPr/>
+        </p:nvSpPr>
+        <p:spPr>
+          <a:xfrm>
+            <a:off x="406301" y="4434929"/>
+            <a:ext cx="8498026" cy="213271"/>
+          </a:xfrm>
+          <a:prstGeom prst="rect">
+            <a:avLst/>
+          </a:prstGeom>
+          <a:noFill/>
+          <a:ln/>
+        </p:spPr>
+        <p:txBody>
+          <a:bodyPr wrap="square" lIns="0" tIns="0" rIns="0" bIns="0" rtlCol="0" anchor="t"/>
+          <a:lstStyle/>
+          <a:p>
+            <a:pPr algn="l" indent="0" marL="0">
+              <a:lnSpc>
+                <a:spcPts val="1680"/>
+              </a:lnSpc>
+              <a:spcBef>
+                <a:spcPts val="300"/>
+              </a:spcBef>
+              <a:spcAft>
+                <a:spcPts val="300"/>
+              </a:spcAft>
+              <a:buNone/>
+            </a:pPr>
+            <a:r>
+              <a:rPr lang="en-US" sz="1200" dirty="0">
+                <a:solidFill>
+                  <a:srgbClr val="1C2833"/>
+                </a:solidFill>
+                <a:latin typeface="Arial" pitchFamily="34" charset="0"/>
+                <a:ea typeface="Arial" pitchFamily="34" charset="-122"/>
+                <a:cs typeface="Arial" pitchFamily="34" charset="-120"/>
+              </a:rPr>
+              <a:t>Middle ·  · IKS Curriculum</a:t>
+            </a:r>
+            <a:endParaRPr lang="en-US" sz="1200" dirty="0"/>
+          </a:p>
+        </p:txBody>
+      </p:sp>
+    </p:spTree>
+  </p:cSld>
+  <p:clrMapOvr>
+    <a:masterClrMapping/>
+  </p:clrMapOvr>
+</p:sld>
+</file>
+
+<file path=ppt/slides/slide15.xml><?xml version="1.0" encoding="utf-8"?>
+<p:sld xmlns:a="http://schemas.openxmlformats.org/drawingml/2006/main" xmlns:r="http://schemas.openxmlformats.org/officeDocument/2006/relationships" xmlns:p="http://schemas.openxmlformats.org/presentationml/2006/main">
+  <p:cSld name="Slide 15">
+    <p:bg>
+      <p:bgPr>
+        <a:solidFill>
+          <a:srgbClr val="FFFFFF"/>
+        </a:solidFill>
+      </p:bgPr>
+    </p:bg>
+    <p:spTree>
+      <p:nvGrpSpPr>
+        <p:cNvPr id="1" name=""/>
+        <p:cNvGrpSpPr/>
+        <p:nvPr/>
+      </p:nvGrpSpPr>
+      <p:grpSpPr>
+        <a:xfrm>
+          <a:off x="0" y="0"/>
+          <a:ext cx="0" cy="0"/>
+          <a:chOff x="0" y="0"/>
+          <a:chExt cx="0" cy="0"/>
+        </a:xfrm>
+      </p:grpSpPr>
+      <p:sp>
+        <p:nvSpPr>
+          <p:cNvPr id="2" name="Text 0"/>
+          <p:cNvSpPr/>
+          <p:nvPr/>
+        </p:nvSpPr>
+        <p:spPr>
+          <a:xfrm>
+            <a:off x="0" y="0"/>
+            <a:ext cx="9144000" cy="101501"/>
+          </a:xfrm>
+          <a:prstGeom prst="rect">
+            <a:avLst/>
+          </a:prstGeom>
+          <a:solidFill>
+            <a:srgbClr val="277884"/>
+          </a:solidFill>
+          <a:ln/>
+        </p:spPr>
+        <p:txBody>
+          <a:bodyPr wrap="square" rtlCol="0" anchor="ctr"/>
+          <a:lstStyle/>
+          <a:p>
+            <a:pPr indent="0" marL="0">
+              <a:buNone/>
+            </a:pPr>
+            <a:endParaRPr lang="en-US" dirty="0"/>
+          </a:p>
+        </p:txBody>
+      </p:sp>
+      <p:sp>
+        <p:nvSpPr>
+          <p:cNvPr id="3" name="Text 1"/>
+          <p:cNvSpPr/>
+          <p:nvPr/>
+        </p:nvSpPr>
+        <p:spPr>
+          <a:xfrm>
+            <a:off x="406301" y="457051"/>
+            <a:ext cx="8498026" cy="274290"/>
+          </a:xfrm>
+          <a:prstGeom prst="rect">
+            <a:avLst/>
+          </a:prstGeom>
+          <a:noFill/>
+          <a:ln/>
+        </p:spPr>
+        <p:txBody>
+          <a:bodyPr wrap="square" lIns="0" tIns="0" rIns="0" bIns="0" rtlCol="0" anchor="t"/>
+          <a:lstStyle/>
+          <a:p>
+            <a:pPr algn="l" indent="0" marL="0">
+              <a:lnSpc>
+                <a:spcPts val="2160"/>
+              </a:lnSpc>
+              <a:spcBef>
+                <a:spcPts val="600"/>
+              </a:spcBef>
+              <a:spcAft>
+                <a:spcPts val="800"/>
+              </a:spcAft>
+              <a:buNone/>
+            </a:pPr>
+            <a:r>
+              <a:rPr lang="en-US" sz="1800" b="1" dirty="0">
+                <a:solidFill>
+                  <a:srgbClr val="FE4447"/>
+                </a:solidFill>
+                <a:latin typeface="Georgia" pitchFamily="34" charset="0"/>
+                <a:ea typeface="Georgia" pitchFamily="34" charset="-122"/>
+                <a:cs typeface="Georgia" pitchFamily="34" charset="-120"/>
+              </a:rPr>
+              <a:t>Student-facing content</a:t>
+            </a:r>
+            <a:endParaRPr lang="en-US" sz="1800" dirty="0"/>
+          </a:p>
+        </p:txBody>
+      </p:sp>
+      <p:sp>
+        <p:nvSpPr>
+          <p:cNvPr id="4" name="Text 2"/>
+          <p:cNvSpPr/>
+          <p:nvPr/>
+        </p:nvSpPr>
+        <p:spPr>
+          <a:xfrm>
+            <a:off x="406301" y="883593"/>
+            <a:ext cx="8331398" cy="1843088"/>
+          </a:xfrm>
+          <a:prstGeom prst="rect">
+            <a:avLst/>
+          </a:prstGeom>
+          <a:solidFill>
+            <a:srgbClr val="F4F8F9"/>
+          </a:solidFill>
+          <a:ln/>
+        </p:spPr>
+        <p:txBody>
+          <a:bodyPr wrap="square" rtlCol="0" anchor="ctr"/>
+          <a:lstStyle/>
+          <a:p>
+            <a:pPr indent="0" marL="0">
+              <a:buNone/>
+            </a:pPr>
+            <a:endParaRPr lang="en-US" dirty="0"/>
+          </a:p>
+        </p:txBody>
+      </p:sp>
+      <p:sp>
+        <p:nvSpPr>
+          <p:cNvPr id="5" name="Shape 3"/>
+          <p:cNvSpPr/>
+          <p:nvPr/>
+        </p:nvSpPr>
+        <p:spPr>
+          <a:xfrm>
+            <a:off x="434876" y="883593"/>
+            <a:ext cx="0" cy="1843088"/>
+          </a:xfrm>
+          <a:prstGeom prst="line">
+            <a:avLst/>
+          </a:prstGeom>
+          <a:noFill/>
+          <a:ln w="57150">
+            <a:solidFill>
+              <a:srgbClr val="FE4447"/>
+            </a:solidFill>
+            <a:prstDash val="solid"/>
+          </a:ln>
+        </p:spPr>
+      </p:sp>
+      <p:sp>
+        <p:nvSpPr>
+          <p:cNvPr id="6" name="Text 4"/>
+          <p:cNvSpPr/>
+          <p:nvPr/>
+        </p:nvSpPr>
+        <p:spPr>
+          <a:xfrm>
+            <a:off x="692051" y="1074093"/>
+            <a:ext cx="7973389" cy="230981"/>
+          </a:xfrm>
+          <a:prstGeom prst="rect">
+            <a:avLst/>
+          </a:prstGeom>
+          <a:noFill/>
+          <a:ln/>
+        </p:spPr>
+        <p:txBody>
+          <a:bodyPr wrap="square" lIns="0" tIns="0" rIns="0" bIns="0" rtlCol="0" anchor="t"/>
+          <a:lstStyle/>
+          <a:p>
+            <a:pPr algn="l" indent="0" marL="0">
+              <a:lnSpc>
+                <a:spcPts val="1820"/>
+              </a:lnSpc>
+              <a:spcBef>
+                <a:spcPts val="300"/>
+              </a:spcBef>
+              <a:spcAft>
+                <a:spcPts val="300"/>
+              </a:spcAft>
+              <a:buNone/>
+            </a:pPr>
+            <a:r>
+              <a:rPr lang="en-US" sz="1300" b="1" i="1" dirty="0">
+                <a:solidFill>
+                  <a:srgbClr val="1C2833"/>
+                </a:solidFill>
+                <a:latin typeface="Georgia" pitchFamily="34" charset="0"/>
+                <a:ea typeface="Georgia" pitchFamily="34" charset="-122"/>
+                <a:cs typeface="Georgia" pitchFamily="34" charset="-120"/>
+              </a:rPr>
+              <a:t>The Moon does not change. Our view of it changes.</a:t>
+            </a:r>
+            <a:endParaRPr lang="en-US" sz="1300" dirty="0"/>
+          </a:p>
+        </p:txBody>
+      </p:sp>
+      <p:sp>
+        <p:nvSpPr>
+          <p:cNvPr id="7" name="Text 5"/>
+          <p:cNvSpPr/>
+          <p:nvPr/>
+        </p:nvSpPr>
+        <p:spPr>
+          <a:xfrm>
+            <a:off x="692051" y="1343174"/>
+            <a:ext cx="7973389" cy="692944"/>
+          </a:xfrm>
+          <a:prstGeom prst="rect">
+            <a:avLst/>
+          </a:prstGeom>
+          <a:noFill/>
+          <a:ln/>
+        </p:spPr>
+        <p:txBody>
+          <a:bodyPr wrap="square" lIns="0" tIns="0" rIns="0" bIns="0" rtlCol="0" anchor="t"/>
+          <a:lstStyle/>
+          <a:p>
+            <a:pPr algn="l" indent="0" marL="0">
+              <a:lnSpc>
+                <a:spcPts val="1820"/>
+              </a:lnSpc>
+              <a:spcBef>
+                <a:spcPts val="300"/>
+              </a:spcBef>
+              <a:spcAft>
+                <a:spcPts val="300"/>
+              </a:spcAft>
+              <a:buNone/>
+            </a:pPr>
+            <a:r>
+              <a:rPr lang="en-US" sz="1300" i="1" dirty="0">
+                <a:solidFill>
+                  <a:srgbClr val="1C2833"/>
+                </a:solidFill>
+                <a:latin typeface="Georgia" pitchFamily="34" charset="0"/>
+                <a:ea typeface="Georgia" pitchFamily="34" charset="-122"/>
+                <a:cs typeface="Georgia" pitchFamily="34" charset="-120"/>
+              </a:rPr>
+              <a:t>The Sun lights up half of the Moon. As the Moon orbits Earth, we see different fractions of that lit half. Over ~29.5 days, the visible fraction grows from nothing (new moon), to a half-disc (quarter), to a full disc (full moon), back to a half, and back to nothing.</a:t>
+            </a:r>
+            <a:endParaRPr lang="en-US" sz="1300" dirty="0"/>
+          </a:p>
+        </p:txBody>
+      </p:sp>
+      <p:sp>
+        <p:nvSpPr>
+          <p:cNvPr id="8" name="Text 6"/>
+          <p:cNvSpPr/>
+          <p:nvPr/>
+        </p:nvSpPr>
+        <p:spPr>
+          <a:xfrm>
+            <a:off x="692051" y="2074218"/>
+            <a:ext cx="7973389" cy="461963"/>
+          </a:xfrm>
+          <a:prstGeom prst="rect">
+            <a:avLst/>
+          </a:prstGeom>
+          <a:noFill/>
+          <a:ln/>
+        </p:spPr>
+        <p:txBody>
+          <a:bodyPr wrap="square" lIns="0" tIns="0" rIns="0" bIns="0" rtlCol="0" anchor="t"/>
+          <a:lstStyle/>
+          <a:p>
+            <a:pPr algn="l" indent="0" marL="0">
+              <a:lnSpc>
+                <a:spcPts val="1820"/>
+              </a:lnSpc>
+              <a:spcBef>
+                <a:spcPts val="300"/>
+              </a:spcBef>
+              <a:spcAft>
+                <a:spcPts val="300"/>
+              </a:spcAft>
+              <a:buNone/>
+            </a:pPr>
+            <a:r>
+              <a:rPr lang="en-US" sz="1300" dirty="0">
+                <a:solidFill>
+                  <a:srgbClr val="1C2833"/>
+                </a:solidFill>
+                <a:latin typeface="Georgia" pitchFamily="34" charset="0"/>
+                <a:ea typeface="Georgia" pitchFamily="34" charset="-122"/>
+                <a:cs typeface="Georgia" pitchFamily="34" charset="-120"/>
+              </a:rPr>
+              <a:t>This 29.5-day cycle is called the </a:t>
+            </a:r>
+            <a:pPr algn="l" indent="0" marL="0">
+              <a:lnSpc>
+                <a:spcPts val="1820"/>
+              </a:lnSpc>
+              <a:spcBef>
+                <a:spcPts val="300"/>
+              </a:spcBef>
+              <a:spcAft>
+                <a:spcPts val="300"/>
+              </a:spcAft>
+              <a:buNone/>
+            </a:pPr>
+            <a:r>
+              <a:rPr lang="en-US" sz="1300" b="1" i="1" dirty="0">
+                <a:solidFill>
+                  <a:srgbClr val="1C2833"/>
+                </a:solidFill>
+                <a:latin typeface="Georgia" pitchFamily="34" charset="0"/>
+                <a:ea typeface="Georgia" pitchFamily="34" charset="-122"/>
+                <a:cs typeface="Georgia" pitchFamily="34" charset="-120"/>
+              </a:rPr>
+              <a:t>synodic month</a:t>
+            </a:r>
+            <a:pPr algn="l" indent="0" marL="0">
+              <a:lnSpc>
+                <a:spcPts val="1820"/>
+              </a:lnSpc>
+              <a:spcBef>
+                <a:spcPts val="300"/>
+              </a:spcBef>
+              <a:spcAft>
+                <a:spcPts val="300"/>
+              </a:spcAft>
+              <a:buNone/>
+            </a:pPr>
+            <a:r>
+              <a:rPr lang="en-US" sz="1300" dirty="0">
+                <a:solidFill>
+                  <a:srgbClr val="1C2833"/>
+                </a:solidFill>
+                <a:latin typeface="Georgia" pitchFamily="34" charset="0"/>
+                <a:ea typeface="Georgia" pitchFamily="34" charset="-122"/>
+                <a:cs typeface="Georgia" pitchFamily="34" charset="-120"/>
+              </a:rPr>
+              <a:t> — the basis of the lunar calendar that we'll study in this module.</a:t>
+            </a:r>
+            <a:endParaRPr lang="en-US" sz="1300" dirty="0"/>
+          </a:p>
+        </p:txBody>
+      </p:sp>
+      <p:sp>
+        <p:nvSpPr>
+          <p:cNvPr id="9" name="Text 7"/>
+          <p:cNvSpPr/>
+          <p:nvPr/>
+        </p:nvSpPr>
+        <p:spPr>
+          <a:xfrm>
+            <a:off x="406301" y="4434929"/>
+            <a:ext cx="8498026" cy="213271"/>
+          </a:xfrm>
+          <a:prstGeom prst="rect">
+            <a:avLst/>
+          </a:prstGeom>
+          <a:noFill/>
+          <a:ln/>
+        </p:spPr>
+        <p:txBody>
+          <a:bodyPr wrap="square" lIns="0" tIns="0" rIns="0" bIns="0" rtlCol="0" anchor="t"/>
+          <a:lstStyle/>
+          <a:p>
+            <a:pPr algn="l" indent="0" marL="0">
+              <a:lnSpc>
+                <a:spcPts val="1680"/>
+              </a:lnSpc>
+              <a:spcBef>
+                <a:spcPts val="300"/>
+              </a:spcBef>
+              <a:spcAft>
+                <a:spcPts val="300"/>
+              </a:spcAft>
+              <a:buNone/>
+            </a:pPr>
+            <a:r>
+              <a:rPr lang="en-US" sz="1200" dirty="0">
+                <a:solidFill>
+                  <a:srgbClr val="1C2833"/>
+                </a:solidFill>
+                <a:latin typeface="Arial" pitchFamily="34" charset="0"/>
+                <a:ea typeface="Arial" pitchFamily="34" charset="-122"/>
+                <a:cs typeface="Arial" pitchFamily="34" charset="-120"/>
+              </a:rPr>
+              <a:t>Middle ·  · IKS Curriculum</a:t>
+            </a:r>
+            <a:endParaRPr lang="en-US" sz="1200" dirty="0"/>
+          </a:p>
+        </p:txBody>
+      </p:sp>
+    </p:spTree>
+  </p:cSld>
+  <p:clrMapOvr>
+    <a:masterClrMapping/>
+  </p:clrMapOvr>
+</p:sld>
+</file>
+
+<file path=ppt/slides/slide16.xml><?xml version="1.0" encoding="utf-8"?>
+<p:sld xmlns:a="http://schemas.openxmlformats.org/drawingml/2006/main" xmlns:r="http://schemas.openxmlformats.org/officeDocument/2006/relationships" xmlns:p="http://schemas.openxmlformats.org/presentationml/2006/main">
+  <p:cSld name="Slide 16">
+    <p:bg>
+      <p:bgPr>
+        <a:solidFill>
+          <a:srgbClr val="FFFFFF"/>
+        </a:solidFill>
+      </p:bgPr>
+    </p:bg>
+    <p:spTree>
+      <p:nvGrpSpPr>
+        <p:cNvPr id="1" name=""/>
+        <p:cNvGrpSpPr/>
+        <p:nvPr/>
+      </p:nvGrpSpPr>
+      <p:grpSpPr>
+        <a:xfrm>
+          <a:off x="0" y="0"/>
+          <a:ext cx="0" cy="0"/>
+          <a:chOff x="0" y="0"/>
+          <a:chExt cx="0" cy="0"/>
+        </a:xfrm>
+      </p:grpSpPr>
+      <p:sp>
+        <p:nvSpPr>
+          <p:cNvPr id="2" name="Text 0"/>
+          <p:cNvSpPr/>
+          <p:nvPr/>
+        </p:nvSpPr>
+        <p:spPr>
+          <a:xfrm>
+            <a:off x="0" y="0"/>
+            <a:ext cx="9144000" cy="101501"/>
+          </a:xfrm>
+          <a:prstGeom prst="rect">
+            <a:avLst/>
+          </a:prstGeom>
+          <a:solidFill>
+            <a:srgbClr val="277884"/>
+          </a:solidFill>
+          <a:ln/>
+        </p:spPr>
+        <p:txBody>
+          <a:bodyPr wrap="square" rtlCol="0" anchor="ctr"/>
+          <a:lstStyle/>
+          <a:p>
+            <a:pPr indent="0" marL="0">
+              <a:buNone/>
+            </a:pPr>
+            <a:endParaRPr lang="en-US" dirty="0"/>
+          </a:p>
+        </p:txBody>
+      </p:sp>
+      <p:sp>
+        <p:nvSpPr>
+          <p:cNvPr id="3" name="Text 1"/>
+          <p:cNvSpPr/>
+          <p:nvPr/>
+        </p:nvSpPr>
+        <p:spPr>
+          <a:xfrm>
+            <a:off x="406301" y="457051"/>
+            <a:ext cx="8498026" cy="274290"/>
+          </a:xfrm>
+          <a:prstGeom prst="rect">
+            <a:avLst/>
+          </a:prstGeom>
+          <a:noFill/>
+          <a:ln/>
+        </p:spPr>
+        <p:txBody>
+          <a:bodyPr wrap="square" lIns="0" tIns="0" rIns="0" bIns="0" rtlCol="0" anchor="t"/>
+          <a:lstStyle/>
+          <a:p>
+            <a:pPr algn="l" indent="0" marL="0">
+              <a:lnSpc>
+                <a:spcPts val="2160"/>
+              </a:lnSpc>
+              <a:spcBef>
+                <a:spcPts val="600"/>
+              </a:spcBef>
+              <a:spcAft>
+                <a:spcPts val="800"/>
+              </a:spcAft>
+              <a:buNone/>
+            </a:pPr>
+            <a:r>
+              <a:rPr lang="en-US" sz="1800" b="1" dirty="0">
+                <a:solidFill>
+                  <a:srgbClr val="FE4447"/>
+                </a:solidFill>
+                <a:latin typeface="Georgia" pitchFamily="34" charset="0"/>
+                <a:ea typeface="Georgia" pitchFamily="34" charset="-122"/>
+                <a:cs typeface="Georgia" pitchFamily="34" charset="-120"/>
+              </a:rPr>
+              <a:t>Homework</a:t>
+            </a:r>
+            <a:endParaRPr lang="en-US" sz="1800" dirty="0"/>
+          </a:p>
+        </p:txBody>
+      </p:sp>
+      <p:sp>
+        <p:nvSpPr>
+          <p:cNvPr id="4" name="Text 2"/>
+          <p:cNvSpPr/>
+          <p:nvPr/>
+        </p:nvSpPr>
+        <p:spPr>
+          <a:xfrm>
+            <a:off x="634901" y="883593"/>
+            <a:ext cx="8102798" cy="693241"/>
+          </a:xfrm>
+          <a:prstGeom prst="rect">
+            <a:avLst/>
+          </a:prstGeom>
+          <a:noFill/>
+          <a:ln/>
+        </p:spPr>
+        <p:txBody>
+          <a:bodyPr wrap="square" lIns="0" tIns="0" rIns="0" bIns="0" rtlCol="0" anchor="t"/>
+          <a:lstStyle/>
+          <a:p>
+            <a:pPr algn="l" marL="342900" indent="-342900">
+              <a:lnSpc>
+                <a:spcPts val="1620"/>
+              </a:lnSpc>
+              <a:spcAft>
+                <a:spcPts val="300"/>
+              </a:spcAft>
+              <a:buSzPct val="100000"/>
+              <a:buChar char="•"/>
+            </a:pPr>
+            <a:r>
+              <a:rPr lang="en-US" sz="1200" b="1" dirty="0">
+                <a:solidFill>
+                  <a:srgbClr val="1C2833"/>
+                </a:solidFill>
+                <a:latin typeface="Arial" pitchFamily="34" charset="0"/>
+                <a:ea typeface="Arial" pitchFamily="34" charset="-122"/>
+                <a:cs typeface="Arial" pitchFamily="34" charset="-120"/>
+              </a:rPr>
+              <a:t>Tonight (and every night for 10 nights):</a:t>
+            </a:r>
+            <a:pPr algn="l" indent="0" marL="0">
+              <a:lnSpc>
+                <a:spcPts val="1620"/>
+              </a:lnSpc>
+              <a:spcAft>
+                <a:spcPts val="300"/>
+              </a:spcAft>
+              <a:buNone/>
+            </a:pPr>
+            <a:r>
+              <a:rPr lang="en-US" sz="1200" dirty="0">
+                <a:solidFill>
+                  <a:srgbClr val="1C2833"/>
+                </a:solidFill>
+                <a:latin typeface="Arial" pitchFamily="34" charset="0"/>
+                <a:ea typeface="Arial" pitchFamily="34" charset="-122"/>
+                <a:cs typeface="Arial" pitchFamily="34" charset="-120"/>
+              </a:rPr>
+              <a:t> Look at the Moon. Sketch its shape in your workbook. Note the date, the time, and "clear / partly cloudy / overcast." If overcast, look it up on a Moon-phase app or NASA's published phase calendar.</a:t>
+            </a:r>
+            <a:endParaRPr lang="en-US" sz="1200" dirty="0"/>
+          </a:p>
+        </p:txBody>
+      </p:sp>
+      <p:sp>
+        <p:nvSpPr>
+          <p:cNvPr id="5" name="Text 3"/>
+          <p:cNvSpPr/>
+          <p:nvPr/>
+        </p:nvSpPr>
+        <p:spPr>
+          <a:xfrm>
+            <a:off x="406301" y="4434929"/>
+            <a:ext cx="8498026" cy="213271"/>
+          </a:xfrm>
+          <a:prstGeom prst="rect">
+            <a:avLst/>
+          </a:prstGeom>
+          <a:noFill/>
+          <a:ln/>
+        </p:spPr>
+        <p:txBody>
+          <a:bodyPr wrap="square" lIns="0" tIns="0" rIns="0" bIns="0" rtlCol="0" anchor="t"/>
+          <a:lstStyle/>
+          <a:p>
+            <a:pPr algn="l" indent="0" marL="0">
+              <a:lnSpc>
+                <a:spcPts val="1680"/>
+              </a:lnSpc>
+              <a:spcBef>
+                <a:spcPts val="300"/>
+              </a:spcBef>
+              <a:spcAft>
+                <a:spcPts val="300"/>
+              </a:spcAft>
+              <a:buNone/>
+            </a:pPr>
+            <a:r>
+              <a:rPr lang="en-US" sz="1200" dirty="0">
+                <a:solidFill>
+                  <a:srgbClr val="1C2833"/>
+                </a:solidFill>
+                <a:latin typeface="Arial" pitchFamily="34" charset="0"/>
+                <a:ea typeface="Arial" pitchFamily="34" charset="-122"/>
+                <a:cs typeface="Arial" pitchFamily="34" charset="-120"/>
+              </a:rPr>
+              <a:t>Middle ·  · IKS Curriculum</a:t>
+            </a:r>
+            <a:endParaRPr lang="en-US" sz="1200" dirty="0"/>
+          </a:p>
+        </p:txBody>
+      </p:sp>
+    </p:spTree>
+  </p:cSld>
+  <p:clrMapOvr>
+    <a:masterClrMapping/>
+  </p:clrMapOvr>
+</p:sld>
+</file>
+
+<file path=ppt/slides/slide17.xml><?xml version="1.0" encoding="utf-8"?>
+<p:sld xmlns:a="http://schemas.openxmlformats.org/drawingml/2006/main" xmlns:r="http://schemas.openxmlformats.org/officeDocument/2006/relationships" xmlns:p="http://schemas.openxmlformats.org/presentationml/2006/main">
+  <p:cSld name="Slide 17">
+    <p:bg>
+      <p:bgPr>
+        <a:solidFill>
+          <a:srgbClr val="FFFFFF"/>
+        </a:solidFill>
+      </p:bgPr>
+    </p:bg>
+    <p:spTree>
+      <p:nvGrpSpPr>
+        <p:cNvPr id="1" name=""/>
+        <p:cNvGrpSpPr/>
+        <p:nvPr/>
+      </p:nvGrpSpPr>
+      <p:grpSpPr>
+        <a:xfrm>
+          <a:off x="0" y="0"/>
+          <a:ext cx="0" cy="0"/>
+          <a:chOff x="0" y="0"/>
+          <a:chExt cx="0" cy="0"/>
+        </a:xfrm>
+      </p:grpSpPr>
+      <p:sp>
+        <p:nvSpPr>
+          <p:cNvPr id="2" name="Text 0"/>
+          <p:cNvSpPr/>
+          <p:nvPr/>
+        </p:nvSpPr>
+        <p:spPr>
+          <a:xfrm>
+            <a:off x="0" y="0"/>
+            <a:ext cx="9144000" cy="101501"/>
+          </a:xfrm>
+          <a:prstGeom prst="rect">
+            <a:avLst/>
+          </a:prstGeom>
+          <a:solidFill>
+            <a:srgbClr val="277884"/>
+          </a:solidFill>
+          <a:ln/>
+        </p:spPr>
+        <p:txBody>
+          <a:bodyPr wrap="square" rtlCol="0" anchor="ctr"/>
+          <a:lstStyle/>
+          <a:p>
+            <a:pPr indent="0" marL="0">
+              <a:buNone/>
+            </a:pPr>
+            <a:endParaRPr lang="en-US" dirty="0"/>
+          </a:p>
+        </p:txBody>
+      </p:sp>
+      <p:sp>
+        <p:nvSpPr>
+          <p:cNvPr id="3" name="Text 1"/>
+          <p:cNvSpPr/>
+          <p:nvPr/>
+        </p:nvSpPr>
+        <p:spPr>
+          <a:xfrm>
+            <a:off x="406301" y="457051"/>
+            <a:ext cx="8498026" cy="274290"/>
+          </a:xfrm>
+          <a:prstGeom prst="rect">
+            <a:avLst/>
+          </a:prstGeom>
+          <a:noFill/>
+          <a:ln/>
+        </p:spPr>
+        <p:txBody>
+          <a:bodyPr wrap="square" lIns="0" tIns="0" rIns="0" bIns="0" rtlCol="0" anchor="t"/>
+          <a:lstStyle/>
+          <a:p>
+            <a:pPr algn="l" indent="0" marL="0">
+              <a:lnSpc>
+                <a:spcPts val="2160"/>
+              </a:lnSpc>
+              <a:spcBef>
+                <a:spcPts val="600"/>
+              </a:spcBef>
+              <a:spcAft>
+                <a:spcPts val="800"/>
+              </a:spcAft>
+              <a:buNone/>
+            </a:pPr>
+            <a:r>
+              <a:rPr lang="en-US" sz="1800" b="1" dirty="0">
+                <a:solidFill>
+                  <a:srgbClr val="FE4447"/>
+                </a:solidFill>
+                <a:latin typeface="Georgia" pitchFamily="34" charset="0"/>
+                <a:ea typeface="Georgia" pitchFamily="34" charset="-122"/>
+                <a:cs typeface="Georgia" pitchFamily="34" charset="-120"/>
+              </a:rPr>
+              <a:t>Differentiation</a:t>
+            </a:r>
+            <a:endParaRPr lang="en-US" sz="1800" dirty="0"/>
+          </a:p>
+        </p:txBody>
+      </p:sp>
+      <p:sp>
+        <p:nvSpPr>
+          <p:cNvPr id="4" name="Text 2"/>
+          <p:cNvSpPr/>
+          <p:nvPr/>
+        </p:nvSpPr>
+        <p:spPr>
+          <a:xfrm>
+            <a:off x="634901" y="883593"/>
+            <a:ext cx="8102798" cy="937022"/>
+          </a:xfrm>
+          <a:prstGeom prst="rect">
+            <a:avLst/>
+          </a:prstGeom>
+          <a:noFill/>
+          <a:ln/>
+        </p:spPr>
+        <p:txBody>
+          <a:bodyPr wrap="square" lIns="0" tIns="0" rIns="0" bIns="0" rtlCol="0" anchor="t"/>
+          <a:lstStyle/>
+          <a:p>
+            <a:pPr algn="l" marL="342900" indent="-342900">
+              <a:lnSpc>
+                <a:spcPts val="1620"/>
+              </a:lnSpc>
+              <a:spcAft>
+                <a:spcPts val="300"/>
+              </a:spcAft>
+              <a:buSzPct val="100000"/>
+              <a:buChar char="•"/>
+            </a:pPr>
+            <a:r>
+              <a:rPr lang="en-US" sz="1200" b="1" dirty="0">
+                <a:solidFill>
+                  <a:srgbClr val="1C2833"/>
+                </a:solidFill>
+                <a:latin typeface="Arial" pitchFamily="34" charset="0"/>
+                <a:ea typeface="Arial" pitchFamily="34" charset="-122"/>
+                <a:cs typeface="Arial" pitchFamily="34" charset="-120"/>
+              </a:rPr>
+              <a:t>One tier up:</a:t>
+            </a:r>
+            <a:pPr algn="l" indent="0" marL="0">
+              <a:lnSpc>
+                <a:spcPts val="1620"/>
+              </a:lnSpc>
+              <a:spcAft>
+                <a:spcPts val="300"/>
+              </a:spcAft>
+              <a:buNone/>
+            </a:pPr>
+            <a:r>
+              <a:rPr lang="en-US" sz="1200" dirty="0">
+                <a:solidFill>
+                  <a:srgbClr val="1C2833"/>
+                </a:solidFill>
+                <a:latin typeface="Arial" pitchFamily="34" charset="0"/>
+                <a:ea typeface="Arial" pitchFamily="34" charset="-122"/>
+                <a:cs typeface="Arial" pitchFamily="34" charset="-120"/>
+              </a:rPr>
+              <a:t> Why is the synodic month (29.53 days) different from the </a:t>
+            </a:r>
+            <a:pPr algn="l" indent="0" marL="0">
+              <a:lnSpc>
+                <a:spcPts val="1620"/>
+              </a:lnSpc>
+              <a:spcAft>
+                <a:spcPts val="300"/>
+              </a:spcAft>
+              <a:buNone/>
+            </a:pPr>
+            <a:r>
+              <a:rPr lang="en-US" sz="1200" i="1" dirty="0">
+                <a:solidFill>
+                  <a:srgbClr val="1C2833"/>
+                </a:solidFill>
+                <a:latin typeface="Arial" pitchFamily="34" charset="0"/>
+                <a:ea typeface="Arial" pitchFamily="34" charset="-122"/>
+                <a:cs typeface="Arial" pitchFamily="34" charset="-120"/>
+              </a:rPr>
+              <a:t>sidereal</a:t>
+            </a:r>
+            <a:pPr algn="l" indent="0" marL="0">
+              <a:lnSpc>
+                <a:spcPts val="1620"/>
+              </a:lnSpc>
+              <a:spcAft>
+                <a:spcPts val="300"/>
+              </a:spcAft>
+              <a:buNone/>
+            </a:pPr>
+            <a:r>
+              <a:rPr lang="en-US" sz="1200" dirty="0">
+                <a:solidFill>
+                  <a:srgbClr val="1C2833"/>
+                </a:solidFill>
+                <a:latin typeface="Arial" pitchFamily="34" charset="0"/>
+                <a:ea typeface="Arial" pitchFamily="34" charset="-122"/>
+                <a:cs typeface="Arial" pitchFamily="34" charset="-120"/>
+              </a:rPr>
+              <a:t> month (27.32 days, the time for the Moon to return to the same star background)? Hint: Earth has moved around the Sun during the lunar month.</a:t>
+            </a:r>
+            <a:endParaRPr lang="en-US" sz="1200" dirty="0"/>
+          </a:p>
+          <a:p>
+            <a:pPr algn="l" marL="342900" indent="-342900">
+              <a:lnSpc>
+                <a:spcPts val="1620"/>
+              </a:lnSpc>
+              <a:spcAft>
+                <a:spcPts val="300"/>
+              </a:spcAft>
+              <a:buSzPct val="100000"/>
+              <a:buChar char="•"/>
+            </a:pPr>
+            <a:r>
+              <a:rPr lang="en-US" sz="1200" b="1" dirty="0">
+                <a:solidFill>
+                  <a:srgbClr val="1C2833"/>
+                </a:solidFill>
+                <a:latin typeface="Arial" pitchFamily="34" charset="0"/>
+                <a:ea typeface="Arial" pitchFamily="34" charset="-122"/>
+                <a:cs typeface="Arial" pitchFamily="34" charset="-120"/>
+              </a:rPr>
+              <a:t>One tier down:</a:t>
+            </a:r>
+            <a:pPr algn="l" indent="0" marL="0">
+              <a:lnSpc>
+                <a:spcPts val="1620"/>
+              </a:lnSpc>
+              <a:spcAft>
+                <a:spcPts val="300"/>
+              </a:spcAft>
+              <a:buNone/>
+            </a:pPr>
+            <a:r>
+              <a:rPr lang="en-US" sz="1200" dirty="0">
+                <a:solidFill>
+                  <a:srgbClr val="1C2833"/>
+                </a:solidFill>
+                <a:latin typeface="Arial" pitchFamily="34" charset="0"/>
+                <a:ea typeface="Arial" pitchFamily="34" charset="-122"/>
+                <a:cs typeface="Arial" pitchFamily="34" charset="-120"/>
+              </a:rPr>
+              <a:t> Skip the 8-position drill. Focus on 4: new, half (waxing), full, half (waning). Build the rest later in the week.</a:t>
+            </a:r>
+            <a:endParaRPr lang="en-US" sz="1200" dirty="0"/>
+          </a:p>
+        </p:txBody>
+      </p:sp>
+      <p:sp>
+        <p:nvSpPr>
+          <p:cNvPr id="5" name="Text 3"/>
+          <p:cNvSpPr/>
+          <p:nvPr/>
+        </p:nvSpPr>
+        <p:spPr>
+          <a:xfrm>
+            <a:off x="406301" y="4434929"/>
+            <a:ext cx="8498026" cy="213271"/>
+          </a:xfrm>
+          <a:prstGeom prst="rect">
+            <a:avLst/>
+          </a:prstGeom>
+          <a:noFill/>
+          <a:ln/>
+        </p:spPr>
+        <p:txBody>
+          <a:bodyPr wrap="square" lIns="0" tIns="0" rIns="0" bIns="0" rtlCol="0" anchor="t"/>
+          <a:lstStyle/>
+          <a:p>
+            <a:pPr algn="l" indent="0" marL="0">
+              <a:lnSpc>
+                <a:spcPts val="1680"/>
+              </a:lnSpc>
+              <a:spcBef>
+                <a:spcPts val="300"/>
+              </a:spcBef>
+              <a:spcAft>
+                <a:spcPts val="300"/>
+              </a:spcAft>
+              <a:buNone/>
+            </a:pPr>
+            <a:r>
+              <a:rPr lang="en-US" sz="1200" dirty="0">
+                <a:solidFill>
+                  <a:srgbClr val="1C2833"/>
+                </a:solidFill>
+                <a:latin typeface="Arial" pitchFamily="34" charset="0"/>
+                <a:ea typeface="Arial" pitchFamily="34" charset="-122"/>
+                <a:cs typeface="Arial" pitchFamily="34" charset="-120"/>
+              </a:rPr>
+              <a:t>Middle ·  · IKS Curriculum</a:t>
+            </a:r>
+            <a:endParaRPr lang="en-US" sz="1200" dirty="0"/>
+          </a:p>
+        </p:txBody>
+      </p:sp>
+    </p:spTree>
+  </p:cSld>
+  <p:clrMapOvr>
+    <a:masterClrMapping/>
+  </p:clrMapOvr>
+</p:sld>
+</file>
+
+<file path=ppt/slides/slide18.xml><?xml version="1.0" encoding="utf-8"?>
+<p:sld xmlns:a="http://schemas.openxmlformats.org/drawingml/2006/main" xmlns:r="http://schemas.openxmlformats.org/officeDocument/2006/relationships" xmlns:p="http://schemas.openxmlformats.org/presentationml/2006/main">
+  <p:cSld name="Slide 18">
+    <p:bg>
+      <p:bgPr>
+        <a:solidFill>
+          <a:srgbClr val="FFFFFF"/>
+        </a:solidFill>
+      </p:bgPr>
+    </p:bg>
+    <p:spTree>
+      <p:nvGrpSpPr>
+        <p:cNvPr id="1" name=""/>
+        <p:cNvGrpSpPr/>
+        <p:nvPr/>
+      </p:nvGrpSpPr>
+      <p:grpSpPr>
+        <a:xfrm>
+          <a:off x="0" y="0"/>
+          <a:ext cx="0" cy="0"/>
+          <a:chOff x="0" y="0"/>
+          <a:chExt cx="0" cy="0"/>
+        </a:xfrm>
+      </p:grpSpPr>
+      <p:sp>
+        <p:nvSpPr>
+          <p:cNvPr id="2" name="Text 0"/>
+          <p:cNvSpPr/>
+          <p:nvPr/>
+        </p:nvSpPr>
+        <p:spPr>
+          <a:xfrm>
+            <a:off x="0" y="0"/>
+            <a:ext cx="9144000" cy="101501"/>
+          </a:xfrm>
+          <a:prstGeom prst="rect">
+            <a:avLst/>
+          </a:prstGeom>
+          <a:solidFill>
+            <a:srgbClr val="277884"/>
+          </a:solidFill>
+          <a:ln/>
+        </p:spPr>
+        <p:txBody>
+          <a:bodyPr wrap="square" rtlCol="0" anchor="ctr"/>
+          <a:lstStyle/>
+          <a:p>
+            <a:pPr indent="0" marL="0">
+              <a:buNone/>
+            </a:pPr>
+            <a:endParaRPr lang="en-US" dirty="0"/>
+          </a:p>
+        </p:txBody>
+      </p:sp>
+      <p:sp>
+        <p:nvSpPr>
+          <p:cNvPr id="3" name="Text 1"/>
+          <p:cNvSpPr/>
+          <p:nvPr/>
+        </p:nvSpPr>
+        <p:spPr>
+          <a:xfrm>
+            <a:off x="406301" y="457051"/>
+            <a:ext cx="8498026" cy="274290"/>
+          </a:xfrm>
+          <a:prstGeom prst="rect">
+            <a:avLst/>
+          </a:prstGeom>
+          <a:noFill/>
+          <a:ln/>
+        </p:spPr>
+        <p:txBody>
+          <a:bodyPr wrap="square" lIns="0" tIns="0" rIns="0" bIns="0" rtlCol="0" anchor="t"/>
+          <a:lstStyle/>
+          <a:p>
+            <a:pPr algn="l" indent="0" marL="0">
+              <a:lnSpc>
+                <a:spcPts val="2160"/>
+              </a:lnSpc>
+              <a:spcBef>
+                <a:spcPts val="600"/>
+              </a:spcBef>
+              <a:spcAft>
+                <a:spcPts val="800"/>
+              </a:spcAft>
+              <a:buNone/>
+            </a:pPr>
+            <a:r>
+              <a:rPr lang="en-US" sz="1800" b="1" dirty="0">
+                <a:solidFill>
+                  <a:srgbClr val="FE4447"/>
+                </a:solidFill>
+                <a:latin typeface="Georgia" pitchFamily="34" charset="0"/>
+                <a:ea typeface="Georgia" pitchFamily="34" charset="-122"/>
+                <a:cs typeface="Georgia" pitchFamily="34" charset="-120"/>
+              </a:rPr>
+              <a:t>Teacher notes</a:t>
+            </a:r>
+            <a:endParaRPr lang="en-US" sz="1800" dirty="0"/>
+          </a:p>
+        </p:txBody>
+      </p:sp>
+      <p:sp>
+        <p:nvSpPr>
+          <p:cNvPr id="4" name="Text 2"/>
+          <p:cNvSpPr/>
+          <p:nvPr/>
+        </p:nvSpPr>
+        <p:spPr>
+          <a:xfrm>
+            <a:off x="634901" y="883593"/>
+            <a:ext cx="8102798" cy="1592163"/>
+          </a:xfrm>
+          <a:prstGeom prst="rect">
+            <a:avLst/>
+          </a:prstGeom>
+          <a:noFill/>
+          <a:ln/>
+        </p:spPr>
+        <p:txBody>
+          <a:bodyPr wrap="square" lIns="0" tIns="0" rIns="0" bIns="0" rtlCol="0" anchor="t"/>
+          <a:lstStyle/>
+          <a:p>
+            <a:pPr algn="l" marL="342900" indent="-342900">
+              <a:lnSpc>
+                <a:spcPts val="1620"/>
+              </a:lnSpc>
+              <a:spcAft>
+                <a:spcPts val="300"/>
+              </a:spcAft>
+              <a:buSzPct val="100000"/>
+              <a:buChar char="•"/>
+            </a:pPr>
+            <a:r>
+              <a:rPr lang="en-US" sz="1200" dirty="0">
+                <a:solidFill>
+                  <a:srgbClr val="1C2833"/>
+                </a:solidFill>
+                <a:latin typeface="Arial" pitchFamily="34" charset="0"/>
+                <a:ea typeface="Arial" pitchFamily="34" charset="-122"/>
+                <a:cs typeface="Arial" pitchFamily="34" charset="-120"/>
+              </a:rPr>
+              <a:t>Some students will say "the Moon makes its own light." It does not — it reflects sunlight. Show them this physically by switching the torch off in the demo. The ball goes dark.</a:t>
+            </a:r>
+            <a:endParaRPr lang="en-US" sz="1200" dirty="0"/>
+          </a:p>
+          <a:p>
+            <a:pPr algn="l" marL="342900" indent="-342900">
+              <a:lnSpc>
+                <a:spcPts val="1620"/>
+              </a:lnSpc>
+              <a:spcAft>
+                <a:spcPts val="300"/>
+              </a:spcAft>
+              <a:buSzPct val="100000"/>
+              <a:buChar char="•"/>
+            </a:pPr>
+            <a:r>
+              <a:rPr lang="en-US" sz="1200" dirty="0">
+                <a:solidFill>
+                  <a:srgbClr val="1C2833"/>
+                </a:solidFill>
+                <a:latin typeface="Arial" pitchFamily="34" charset="0"/>
+                <a:ea typeface="Arial" pitchFamily="34" charset="-122"/>
+                <a:cs typeface="Arial" pitchFamily="34" charset="-120"/>
+              </a:rPr>
+              <a:t>Some will say "the Moon's far side is permanently dark." It is not. The Moon's far side gets just as much sunlight as the near side, on average — we just never see the far side from Earth because the Moon is tidally locked (the same face always faces us).</a:t>
+            </a:r>
+            <a:endParaRPr lang="en-US" sz="1200" dirty="0"/>
+          </a:p>
+          <a:p>
+            <a:pPr algn="l" marL="342900" indent="-342900">
+              <a:lnSpc>
+                <a:spcPts val="1620"/>
+              </a:lnSpc>
+              <a:spcAft>
+                <a:spcPts val="300"/>
+              </a:spcAft>
+              <a:buSzPct val="100000"/>
+              <a:buChar char="•"/>
+            </a:pPr>
+            <a:r>
+              <a:rPr lang="en-US" sz="1200" dirty="0">
+                <a:solidFill>
+                  <a:srgbClr val="1C2833"/>
+                </a:solidFill>
+                <a:latin typeface="Arial" pitchFamily="34" charset="0"/>
+                <a:ea typeface="Arial" pitchFamily="34" charset="-122"/>
+                <a:cs typeface="Arial" pitchFamily="34" charset="-120"/>
+              </a:rPr>
+              <a:t>For the diary, if students live in a heavily light-polluted city, the thin crescents may be hard to spot in twilight. They can use an app for verification — that's acceptable.</a:t>
+            </a:r>
+            <a:endParaRPr lang="en-US" sz="1200" dirty="0"/>
+          </a:p>
+        </p:txBody>
+      </p:sp>
+      <p:sp>
+        <p:nvSpPr>
+          <p:cNvPr id="5" name="Text 3"/>
+          <p:cNvSpPr/>
+          <p:nvPr/>
+        </p:nvSpPr>
+        <p:spPr>
+          <a:xfrm>
+            <a:off x="406301" y="4434929"/>
+            <a:ext cx="8498026" cy="213271"/>
+          </a:xfrm>
+          <a:prstGeom prst="rect">
+            <a:avLst/>
+          </a:prstGeom>
+          <a:noFill/>
+          <a:ln/>
+        </p:spPr>
+        <p:txBody>
+          <a:bodyPr wrap="square" lIns="0" tIns="0" rIns="0" bIns="0" rtlCol="0" anchor="t"/>
+          <a:lstStyle/>
+          <a:p>
+            <a:pPr algn="l" indent="0" marL="0">
+              <a:lnSpc>
+                <a:spcPts val="1680"/>
+              </a:lnSpc>
+              <a:spcBef>
+                <a:spcPts val="300"/>
+              </a:spcBef>
+              <a:spcAft>
+                <a:spcPts val="300"/>
+              </a:spcAft>
+              <a:buNone/>
+            </a:pPr>
+            <a:r>
+              <a:rPr lang="en-US" sz="1200" dirty="0">
+                <a:solidFill>
+                  <a:srgbClr val="1C2833"/>
+                </a:solidFill>
+                <a:latin typeface="Arial" pitchFamily="34" charset="0"/>
+                <a:ea typeface="Arial" pitchFamily="34" charset="-122"/>
+                <a:cs typeface="Arial" pitchFamily="34" charset="-120"/>
+              </a:rPr>
+              <a:t>Middle ·  · IKS Curriculum</a:t>
+            </a:r>
+            <a:endParaRPr lang="en-US" sz="1200" dirty="0"/>
+          </a:p>
+        </p:txBody>
+      </p:sp>
+    </p:spTree>
+  </p:cSld>
+  <p:clrMapOvr>
+    <a:masterClrMapping/>
+  </p:clrMapOvr>
+</p:sld>
+</file>
+
+<file path=ppt/slides/slide19.xml><?xml version="1.0" encoding="utf-8"?>
+<p:sld xmlns:a="http://schemas.openxmlformats.org/drawingml/2006/main" xmlns:r="http://schemas.openxmlformats.org/officeDocument/2006/relationships" xmlns:p="http://schemas.openxmlformats.org/presentationml/2006/main">
+  <p:cSld name="Slide 19">
+    <p:bg>
+      <p:bgPr>
+        <a:solidFill>
+          <a:srgbClr val="FFFFFF"/>
+        </a:solidFill>
+      </p:bgPr>
+    </p:bg>
+    <p:spTree>
+      <p:nvGrpSpPr>
+        <p:cNvPr id="1" name=""/>
+        <p:cNvGrpSpPr/>
+        <p:nvPr/>
+      </p:nvGrpSpPr>
+      <p:grpSpPr>
+        <a:xfrm>
+          <a:off x="0" y="0"/>
+          <a:ext cx="0" cy="0"/>
+          <a:chOff x="0" y="0"/>
+          <a:chExt cx="0" cy="0"/>
+        </a:xfrm>
+      </p:grpSpPr>
+      <p:sp>
+        <p:nvSpPr>
+          <p:cNvPr id="2" name="Text 0"/>
+          <p:cNvSpPr/>
+          <p:nvPr/>
+        </p:nvSpPr>
+        <p:spPr>
+          <a:xfrm>
+            <a:off x="0" y="0"/>
+            <a:ext cx="9144000" cy="101501"/>
+          </a:xfrm>
+          <a:prstGeom prst="rect">
+            <a:avLst/>
+          </a:prstGeom>
+          <a:solidFill>
+            <a:srgbClr val="277884"/>
+          </a:solidFill>
+          <a:ln/>
+        </p:spPr>
+        <p:txBody>
+          <a:bodyPr wrap="square" rtlCol="0" anchor="ctr"/>
+          <a:lstStyle/>
+          <a:p>
+            <a:pPr indent="0" marL="0">
+              <a:buNone/>
+            </a:pPr>
+            <a:endParaRPr lang="en-US" dirty="0"/>
+          </a:p>
+        </p:txBody>
+      </p:sp>
+      <p:sp>
+        <p:nvSpPr>
+          <p:cNvPr id="3" name="Text 1"/>
+          <p:cNvSpPr/>
+          <p:nvPr/>
+        </p:nvSpPr>
+        <p:spPr>
+          <a:xfrm>
+            <a:off x="406301" y="457051"/>
+            <a:ext cx="8498026" cy="274290"/>
+          </a:xfrm>
+          <a:prstGeom prst="rect">
+            <a:avLst/>
+          </a:prstGeom>
+          <a:noFill/>
+          <a:ln/>
+        </p:spPr>
+        <p:txBody>
+          <a:bodyPr wrap="square" lIns="0" tIns="0" rIns="0" bIns="0" rtlCol="0" anchor="t"/>
+          <a:lstStyle/>
+          <a:p>
+            <a:pPr algn="l" indent="0" marL="0">
+              <a:lnSpc>
+                <a:spcPts val="2160"/>
+              </a:lnSpc>
+              <a:spcBef>
+                <a:spcPts val="600"/>
+              </a:spcBef>
+              <a:spcAft>
+                <a:spcPts val="800"/>
+              </a:spcAft>
+              <a:buNone/>
+            </a:pPr>
+            <a:r>
+              <a:rPr lang="en-US" sz="1800" b="1" dirty="0">
+                <a:solidFill>
+                  <a:srgbClr val="FE4447"/>
+                </a:solidFill>
+                <a:latin typeface="Georgia" pitchFamily="34" charset="0"/>
+                <a:ea typeface="Georgia" pitchFamily="34" charset="-122"/>
+                <a:cs typeface="Georgia" pitchFamily="34" charset="-120"/>
+              </a:rPr>
+              <a:t>Citation(s) used in this lesson</a:t>
+            </a:r>
+            <a:endParaRPr lang="en-US" sz="1800" dirty="0"/>
+          </a:p>
+        </p:txBody>
+      </p:sp>
+      <p:sp>
+        <p:nvSpPr>
+          <p:cNvPr id="4" name="Text 2"/>
+          <p:cNvSpPr/>
+          <p:nvPr/>
+        </p:nvSpPr>
+        <p:spPr>
+          <a:xfrm>
+            <a:off x="634901" y="883593"/>
+            <a:ext cx="8102798" cy="281880"/>
+          </a:xfrm>
+          <a:prstGeom prst="rect">
+            <a:avLst/>
+          </a:prstGeom>
+          <a:noFill/>
+          <a:ln/>
+        </p:spPr>
+        <p:txBody>
+          <a:bodyPr wrap="square" lIns="0" tIns="0" rIns="0" bIns="0" rtlCol="0" anchor="t"/>
+          <a:lstStyle/>
+          <a:p>
+            <a:pPr algn="l" marL="342900" indent="-342900">
+              <a:lnSpc>
+                <a:spcPts val="1620"/>
+              </a:lnSpc>
+              <a:spcAft>
+                <a:spcPts val="300"/>
+              </a:spcAft>
+              <a:buSzPct val="100000"/>
+              <a:buChar char="•"/>
+            </a:pPr>
+            <a:r>
+              <a:rPr lang="en-US" sz="1200" dirty="0">
+                <a:solidFill>
+                  <a:srgbClr val="1C2833"/>
+                </a:solidFill>
+                <a:latin typeface="Arial" pitchFamily="34" charset="0"/>
+                <a:ea typeface="Arial" pitchFamily="34" charset="-122"/>
+                <a:cs typeface="Arial" pitchFamily="34" charset="-120"/>
+              </a:rPr>
+              <a:t>General reference: NCERT Science Class 6, Chapter 17 ("Stars and the Solar System"). No verse citation today.</a:t>
             </a:r>
             <a:endParaRPr lang="en-US" sz="1200" dirty="0"/>
           </a:p>
@@ -3060,7 +5901,7 @@
                 <a:ea typeface="Georgia" pitchFamily="34" charset="-122"/>
                 <a:cs typeface="Georgia" pitchFamily="34" charset="-120"/>
               </a:rPr>
-              <a:t>Materials</a:t>
+              <a:t>Learning objective</a:t>
             </a:r>
             <a:endParaRPr lang="en-US" sz="1800" dirty="0"/>
           </a:p>
@@ -3108,7 +5949,7 @@
                 <a:ea typeface="Arial" pitchFamily="34" charset="-122"/>
                 <a:cs typeface="Arial" pitchFamily="34" charset="-120"/>
               </a:rPr>
-              <a:t>– A torch / flashlight (the brighter the better — bring spare batteries) – A small white ball (a table-tennis ball or a styrofoam ball about 4 cm across) – A darkened classroom (curtains drawn or lights off for ~10 min) – Whiteboard – Notebooks</a:t>
+              <a:t>Students will explain, with a physical model, why the Moon appears to change shape over a ~29.5-day cycle, and will name the synodic month as the underlying period.</a:t>
             </a:r>
             <a:endParaRPr lang="en-US" sz="1200" dirty="0"/>
           </a:p>
@@ -3266,7 +6107,7 @@
                 <a:ea typeface="Georgia" pitchFamily="34" charset="-122"/>
                 <a:cs typeface="Georgia" pitchFamily="34" charset="-120"/>
               </a:rPr>
-              <a:t>Vocabulary introduced today</a:t>
+              <a:t>Materials</a:t>
             </a:r>
             <a:endParaRPr lang="en-US" sz="1800" dirty="0"/>
           </a:p>
@@ -3281,7 +6122,7 @@
         <p:spPr>
           <a:xfrm>
             <a:off x="634901" y="883593"/>
-            <a:ext cx="8102798" cy="281880"/>
+            <a:ext cx="8102798" cy="1257002"/>
           </a:xfrm>
           <a:prstGeom prst="rect">
             <a:avLst/>
@@ -3304,24 +6145,28 @@
               <a:buChar char="•"/>
             </a:pPr>
             <a:r>
-              <a:rPr lang="en-US" sz="1200" i="1" dirty="0">
-                <a:solidFill>
-                  <a:srgbClr val="1C2833"/>
-                </a:solidFill>
-                <a:latin typeface="Arial" pitchFamily="34" charset="0"/>
-                <a:ea typeface="Arial" pitchFamily="34" charset="-122"/>
-                <a:cs typeface="Arial" pitchFamily="34" charset="-120"/>
-              </a:rPr>
-              <a:t>synodic month</a:t>
-            </a:r>
-            <a:pPr algn="l" indent="0" marL="0">
+              <a:rPr lang="en-US" sz="1200" dirty="0">
+                <a:solidFill>
+                  <a:srgbClr val="1C2833"/>
+                </a:solidFill>
+                <a:latin typeface="Arial" pitchFamily="34" charset="0"/>
+                <a:ea typeface="Arial" pitchFamily="34" charset="-122"/>
+                <a:cs typeface="Arial" pitchFamily="34" charset="-120"/>
+              </a:rPr>
+              <a:t>A torch / flashlight (the brighter the better — bring spare batteries)</a:t>
+            </a:r>
+            <a:endParaRPr lang="en-US" sz="1200" dirty="0"/>
+          </a:p>
+          <a:p>
+            <a:pPr algn="l" marL="342900" indent="-342900">
               <a:lnSpc>
                 <a:spcPts val="1620"/>
               </a:lnSpc>
               <a:spcAft>
                 <a:spcPts val="300"/>
               </a:spcAft>
-              <a:buNone/>
+              <a:buSzPct val="100000"/>
+              <a:buChar char="•"/>
             </a:pPr>
             <a:r>
               <a:rPr lang="en-US" sz="1200" dirty="0">
@@ -3332,63 +6177,87 @@
                 <a:ea typeface="Arial" pitchFamily="34" charset="-122"/>
                 <a:cs typeface="Arial" pitchFamily="34" charset="-120"/>
               </a:rPr>
-              <a:t> — the ~29.53-day period from one new moon to the next; the basis of the lunar calendar.</a:t>
+              <a:t>A small white ball (a table-tennis ball or a styrofoam ball about 4 cm across)</a:t>
             </a:r>
             <a:endParaRPr lang="en-US" sz="1200" dirty="0"/>
           </a:p>
+          <a:p>
+            <a:pPr algn="l" marL="342900" indent="-342900">
+              <a:lnSpc>
+                <a:spcPts val="1620"/>
+              </a:lnSpc>
+              <a:spcAft>
+                <a:spcPts val="300"/>
+              </a:spcAft>
+              <a:buSzPct val="100000"/>
+              <a:buChar char="•"/>
+            </a:pPr>
+            <a:r>
+              <a:rPr lang="en-US" sz="1200" dirty="0">
+                <a:solidFill>
+                  <a:srgbClr val="1C2833"/>
+                </a:solidFill>
+                <a:latin typeface="Arial" pitchFamily="34" charset="0"/>
+                <a:ea typeface="Arial" pitchFamily="34" charset="-122"/>
+                <a:cs typeface="Arial" pitchFamily="34" charset="-120"/>
+              </a:rPr>
+              <a:t>A darkened classroom (curtains drawn or lights off for ~10 min)</a:t>
+            </a:r>
+            <a:endParaRPr lang="en-US" sz="1200" dirty="0"/>
+          </a:p>
+          <a:p>
+            <a:pPr algn="l" marL="342900" indent="-342900">
+              <a:lnSpc>
+                <a:spcPts val="1620"/>
+              </a:lnSpc>
+              <a:spcAft>
+                <a:spcPts val="300"/>
+              </a:spcAft>
+              <a:buSzPct val="100000"/>
+              <a:buChar char="•"/>
+            </a:pPr>
+            <a:r>
+              <a:rPr lang="en-US" sz="1200" dirty="0">
+                <a:solidFill>
+                  <a:srgbClr val="1C2833"/>
+                </a:solidFill>
+                <a:latin typeface="Arial" pitchFamily="34" charset="0"/>
+                <a:ea typeface="Arial" pitchFamily="34" charset="-122"/>
+                <a:cs typeface="Arial" pitchFamily="34" charset="-120"/>
+              </a:rPr>
+              <a:t>Whiteboard</a:t>
+            </a:r>
+            <a:endParaRPr lang="en-US" sz="1200" dirty="0"/>
+          </a:p>
+          <a:p>
+            <a:pPr algn="l" marL="342900" indent="-342900">
+              <a:lnSpc>
+                <a:spcPts val="1620"/>
+              </a:lnSpc>
+              <a:spcAft>
+                <a:spcPts val="300"/>
+              </a:spcAft>
+              <a:buSzPct val="100000"/>
+              <a:buChar char="•"/>
+            </a:pPr>
+            <a:r>
+              <a:rPr lang="en-US" sz="1200" dirty="0">
+                <a:solidFill>
+                  <a:srgbClr val="1C2833"/>
+                </a:solidFill>
+                <a:latin typeface="Arial" pitchFamily="34" charset="0"/>
+                <a:ea typeface="Arial" pitchFamily="34" charset="-122"/>
+                <a:cs typeface="Arial" pitchFamily="34" charset="-120"/>
+              </a:rPr>
+              <a:t>Notebooks</a:t>
+            </a:r>
+            <a:endParaRPr lang="en-US" sz="1200" dirty="0"/>
+          </a:p>
         </p:txBody>
       </p:sp>
       <p:sp>
         <p:nvSpPr>
           <p:cNvPr id="5" name="Text 3"/>
-          <p:cNvSpPr/>
-          <p:nvPr/>
-        </p:nvSpPr>
-        <p:spPr>
-          <a:xfrm>
-            <a:off x="406301" y="1254323"/>
-            <a:ext cx="8498026" cy="213271"/>
-          </a:xfrm>
-          <a:prstGeom prst="rect">
-            <a:avLst/>
-          </a:prstGeom>
-          <a:noFill/>
-          <a:ln/>
-        </p:spPr>
-        <p:txBody>
-          <a:bodyPr wrap="square" lIns="0" tIns="0" rIns="0" bIns="0" rtlCol="0" anchor="t"/>
-          <a:lstStyle/>
-          <a:p>
-            <a:pPr algn="l" indent="0" marL="0">
-              <a:lnSpc>
-                <a:spcPts val="1680"/>
-              </a:lnSpc>
-              <a:spcBef>
-                <a:spcPts val="300"/>
-              </a:spcBef>
-              <a:spcAft>
-                <a:spcPts val="300"/>
-              </a:spcAft>
-              <a:buNone/>
-            </a:pPr>
-            <a:r>
-              <a:rPr lang="en-US" sz="1200" dirty="0">
-                <a:solidFill>
-                  <a:srgbClr val="1C2833"/>
-                </a:solidFill>
-                <a:latin typeface="Arial" pitchFamily="34" charset="0"/>
-                <a:ea typeface="Arial" pitchFamily="34" charset="-122"/>
-                <a:cs typeface="Arial" pitchFamily="34" charset="-120"/>
-              </a:rPr>
-              <a:t>(Sanskrit terms start tomorrow. Day 1 is observational and physical.)</a:t>
-            </a:r>
-            <a:endParaRPr lang="en-US" sz="1200" dirty="0"/>
-          </a:p>
-        </p:txBody>
-      </p:sp>
-      <p:sp>
-        <p:nvSpPr>
-          <p:cNvPr id="6" name="Text 4"/>
           <p:cNvSpPr/>
           <p:nvPr/>
         </p:nvSpPr>
@@ -3538,7 +6407,7 @@
                 <a:ea typeface="Georgia" pitchFamily="34" charset="-122"/>
                 <a:cs typeface="Georgia" pitchFamily="34" charset="-120"/>
               </a:rPr>
-              <a:t>Lesson flow</a:t>
+              <a:t>Vocabulary introduced today</a:t>
             </a:r>
             <a:endParaRPr lang="en-US" sz="1800" dirty="0"/>
           </a:p>
@@ -3547,6 +6416,120 @@
       <p:sp>
         <p:nvSpPr>
           <p:cNvPr id="4" name="Text 2"/>
+          <p:cNvSpPr/>
+          <p:nvPr/>
+        </p:nvSpPr>
+        <p:spPr>
+          <a:xfrm>
+            <a:off x="634901" y="883593"/>
+            <a:ext cx="8102798" cy="281880"/>
+          </a:xfrm>
+          <a:prstGeom prst="rect">
+            <a:avLst/>
+          </a:prstGeom>
+          <a:noFill/>
+          <a:ln/>
+        </p:spPr>
+        <p:txBody>
+          <a:bodyPr wrap="square" lIns="0" tIns="0" rIns="0" bIns="0" rtlCol="0" anchor="t"/>
+          <a:lstStyle/>
+          <a:p>
+            <a:pPr algn="l" marL="342900" indent="-342900">
+              <a:lnSpc>
+                <a:spcPts val="1620"/>
+              </a:lnSpc>
+              <a:spcAft>
+                <a:spcPts val="300"/>
+              </a:spcAft>
+              <a:buSzPct val="100000"/>
+              <a:buChar char="•"/>
+            </a:pPr>
+            <a:r>
+              <a:rPr lang="en-US" sz="1200" i="1" dirty="0">
+                <a:solidFill>
+                  <a:srgbClr val="1C2833"/>
+                </a:solidFill>
+                <a:latin typeface="Arial" pitchFamily="34" charset="0"/>
+                <a:ea typeface="Arial" pitchFamily="34" charset="-122"/>
+                <a:cs typeface="Arial" pitchFamily="34" charset="-120"/>
+              </a:rPr>
+              <a:t>synodic month</a:t>
+            </a:r>
+            <a:pPr algn="l" indent="0" marL="0">
+              <a:lnSpc>
+                <a:spcPts val="1620"/>
+              </a:lnSpc>
+              <a:spcAft>
+                <a:spcPts val="300"/>
+              </a:spcAft>
+              <a:buNone/>
+            </a:pPr>
+            <a:r>
+              <a:rPr lang="en-US" sz="1200" dirty="0">
+                <a:solidFill>
+                  <a:srgbClr val="1C2833"/>
+                </a:solidFill>
+                <a:latin typeface="Arial" pitchFamily="34" charset="0"/>
+                <a:ea typeface="Arial" pitchFamily="34" charset="-122"/>
+                <a:cs typeface="Arial" pitchFamily="34" charset="-120"/>
+              </a:rPr>
+              <a:t> — the ~29.53-day period from one new moon to the next; the basis of the lunar calendar.</a:t>
+            </a:r>
+            <a:endParaRPr lang="en-US" sz="1200" dirty="0"/>
+          </a:p>
+        </p:txBody>
+      </p:sp>
+      <p:sp>
+        <p:nvSpPr>
+          <p:cNvPr id="5" name="Text 3"/>
+          <p:cNvSpPr/>
+          <p:nvPr/>
+        </p:nvSpPr>
+        <p:spPr>
+          <a:xfrm>
+            <a:off x="406301" y="1254323"/>
+            <a:ext cx="8498026" cy="213271"/>
+          </a:xfrm>
+          <a:prstGeom prst="rect">
+            <a:avLst/>
+          </a:prstGeom>
+          <a:noFill/>
+          <a:ln/>
+        </p:spPr>
+        <p:txBody>
+          <a:bodyPr wrap="square" lIns="0" tIns="0" rIns="0" bIns="0" rtlCol="0" anchor="t"/>
+          <a:lstStyle/>
+          <a:p>
+            <a:pPr algn="l" indent="0" marL="0">
+              <a:lnSpc>
+                <a:spcPts val="1680"/>
+              </a:lnSpc>
+              <a:spcBef>
+                <a:spcPts val="300"/>
+              </a:spcBef>
+              <a:spcAft>
+                <a:spcPts val="300"/>
+              </a:spcAft>
+              <a:buNone/>
+            </a:pPr>
+            <a:r>
+              <a:rPr lang="en-US" sz="1200" dirty="0">
+                <a:solidFill>
+                  <a:srgbClr val="1C2833"/>
+                </a:solidFill>
+                <a:latin typeface="Arial" pitchFamily="34" charset="0"/>
+                <a:ea typeface="Arial" pitchFamily="34" charset="-122"/>
+                <a:cs typeface="Arial" pitchFamily="34" charset="-120"/>
+              </a:rPr>
+              <a:t>(Sanskrit terms start tomorrow. Day 1 is observational and physical.)</a:t>
+            </a:r>
+            <a:endParaRPr lang="en-US" sz="1200" dirty="0"/>
+          </a:p>
+        </p:txBody>
+      </p:sp>
+      <p:sp>
+        <p:nvSpPr>
+          <p:cNvPr id="6" name="Text 4"/>
           <p:cNvSpPr/>
           <p:nvPr/>
         </p:nvSpPr>
@@ -3696,7 +6679,7 @@
                 <a:ea typeface="Georgia" pitchFamily="34" charset="-122"/>
                 <a:cs typeface="Georgia" pitchFamily="34" charset="-120"/>
               </a:rPr>
-              <a:t>Warm-up (5 min)</a:t>
+              <a:t>Lesson flow</a:t>
             </a:r>
             <a:endParaRPr lang="en-US" sz="1800" dirty="0"/>
           </a:p>
@@ -3705,146 +6688,6 @@
       <p:sp>
         <p:nvSpPr>
           <p:cNvPr id="4" name="Text 2"/>
-          <p:cNvSpPr/>
-          <p:nvPr/>
-        </p:nvSpPr>
-        <p:spPr>
-          <a:xfrm>
-            <a:off x="406301" y="870942"/>
-            <a:ext cx="8498026" cy="426541"/>
-          </a:xfrm>
-          <a:prstGeom prst="rect">
-            <a:avLst/>
-          </a:prstGeom>
-          <a:noFill/>
-          <a:ln/>
-        </p:spPr>
-        <p:txBody>
-          <a:bodyPr wrap="square" lIns="0" tIns="0" rIns="0" bIns="0" rtlCol="0" anchor="t"/>
-          <a:lstStyle/>
-          <a:p>
-            <a:pPr algn="l" indent="0" marL="0">
-              <a:lnSpc>
-                <a:spcPts val="1680"/>
-              </a:lnSpc>
-              <a:spcBef>
-                <a:spcPts val="300"/>
-              </a:spcBef>
-              <a:spcAft>
-                <a:spcPts val="300"/>
-              </a:spcAft>
-              <a:buNone/>
-            </a:pPr>
-            <a:r>
-              <a:rPr lang="en-US" sz="1200" dirty="0">
-                <a:solidFill>
-                  <a:srgbClr val="1C2833"/>
-                </a:solidFill>
-                <a:latin typeface="Arial" pitchFamily="34" charset="0"/>
-                <a:ea typeface="Arial" pitchFamily="34" charset="-122"/>
-                <a:cs typeface="Arial" pitchFamily="34" charset="-120"/>
-              </a:rPr>
-              <a:t>– Opening question on board: </a:t>
-            </a:r>
-            <a:pPr algn="l" indent="0" marL="0">
-              <a:lnSpc>
-                <a:spcPts val="1680"/>
-              </a:lnSpc>
-              <a:spcBef>
-                <a:spcPts val="300"/>
-              </a:spcBef>
-              <a:spcAft>
-                <a:spcPts val="300"/>
-              </a:spcAft>
-              <a:buNone/>
-            </a:pPr>
-            <a:r>
-              <a:rPr lang="en-US" sz="1200" i="1" dirty="0">
-                <a:solidFill>
-                  <a:srgbClr val="1C2833"/>
-                </a:solidFill>
-                <a:latin typeface="Arial" pitchFamily="34" charset="0"/>
-                <a:ea typeface="Arial" pitchFamily="34" charset="-122"/>
-                <a:cs typeface="Arial" pitchFamily="34" charset="-120"/>
-              </a:rPr>
-              <a:t>"Did you see the Moon last night? What shape was it?"</a:t>
-            </a:r>
-            <a:pPr algn="l" indent="0" marL="0">
-              <a:lnSpc>
-                <a:spcPts val="1680"/>
-              </a:lnSpc>
-              <a:spcBef>
-                <a:spcPts val="300"/>
-              </a:spcBef>
-              <a:spcAft>
-                <a:spcPts val="300"/>
-              </a:spcAft>
-              <a:buNone/>
-            </a:pPr>
-            <a:r>
-              <a:rPr lang="en-US" sz="1200" dirty="0">
-                <a:solidFill>
-                  <a:srgbClr val="1C2833"/>
-                </a:solidFill>
-                <a:latin typeface="Arial" pitchFamily="34" charset="0"/>
-                <a:ea typeface="Arial" pitchFamily="34" charset="-122"/>
-                <a:cs typeface="Arial" pitchFamily="34" charset="-120"/>
-              </a:rPr>
-              <a:t> – Take 4–5 students' answers. Sketch each shape they describe on the board (don't correct yet — just record).</a:t>
-            </a:r>
-            <a:endParaRPr lang="en-US" sz="1200" dirty="0"/>
-          </a:p>
-        </p:txBody>
-      </p:sp>
-      <p:sp>
-        <p:nvSpPr>
-          <p:cNvPr id="5" name="Text 3"/>
-          <p:cNvSpPr/>
-          <p:nvPr/>
-        </p:nvSpPr>
-        <p:spPr>
-          <a:xfrm>
-            <a:off x="634901" y="1386334"/>
-            <a:ext cx="8102798" cy="281880"/>
-          </a:xfrm>
-          <a:prstGeom prst="rect">
-            <a:avLst/>
-          </a:prstGeom>
-          <a:noFill/>
-          <a:ln/>
-        </p:spPr>
-        <p:txBody>
-          <a:bodyPr wrap="square" lIns="0" tIns="0" rIns="0" bIns="0" rtlCol="0" anchor="t"/>
-          <a:lstStyle/>
-          <a:p>
-            <a:pPr algn="l" marL="342900" indent="-342900">
-              <a:lnSpc>
-                <a:spcPts val="1620"/>
-              </a:lnSpc>
-              <a:spcAft>
-                <a:spcPts val="300"/>
-              </a:spcAft>
-              <a:buSzPct val="100000"/>
-              <a:buChar char="•"/>
-            </a:pPr>
-            <a:r>
-              <a:rPr lang="en-US" sz="1200" i="1" dirty="0">
-                <a:solidFill>
-                  <a:srgbClr val="1C2833"/>
-                </a:solidFill>
-                <a:latin typeface="Arial" pitchFamily="34" charset="0"/>
-                <a:ea typeface="Arial" pitchFamily="34" charset="-122"/>
-                <a:cs typeface="Arial" pitchFamily="34" charset="-120"/>
-              </a:rPr>
-              <a:t>"Why is it sometimes a full circle, sometimes a thin sliver, sometimes nothing at all? That's what this module answers."</a:t>
-            </a:r>
-            <a:endParaRPr lang="en-US" sz="1200" dirty="0"/>
-          </a:p>
-        </p:txBody>
-      </p:sp>
-      <p:sp>
-        <p:nvSpPr>
-          <p:cNvPr id="6" name="Text 4"/>
           <p:cNvSpPr/>
           <p:nvPr/>
         </p:nvSpPr>
@@ -3994,7 +6837,7 @@
                 <a:ea typeface="Georgia" pitchFamily="34" charset="-122"/>
                 <a:cs typeface="Georgia" pitchFamily="34" charset="-120"/>
               </a:rPr>
-              <a:t>Activity (15 min) — Pair sketching</a:t>
+              <a:t>Warm-up (5 min)</a:t>
             </a:r>
             <a:endParaRPr lang="en-US" sz="1800" dirty="0"/>
           </a:p>
@@ -4008,8 +6851,8 @@
         </p:nvSpPr>
         <p:spPr>
           <a:xfrm>
-            <a:off x="406301" y="870942"/>
-            <a:ext cx="8498026" cy="213271"/>
+            <a:off x="634901" y="883593"/>
+            <a:ext cx="8102798" cy="769441"/>
           </a:xfrm>
           <a:prstGeom prst="rect">
             <a:avLst/>
@@ -4021,54 +6864,6 @@
           <a:bodyPr wrap="square" lIns="0" tIns="0" rIns="0" bIns="0" rtlCol="0" anchor="t"/>
           <a:lstStyle/>
           <a:p>
-            <a:pPr algn="l" indent="0" marL="0">
-              <a:lnSpc>
-                <a:spcPts val="1680"/>
-              </a:lnSpc>
-              <a:spcBef>
-                <a:spcPts val="300"/>
-              </a:spcBef>
-              <a:spcAft>
-                <a:spcPts val="300"/>
-              </a:spcAft>
-              <a:buNone/>
-            </a:pPr>
-            <a:r>
-              <a:rPr lang="en-US" sz="1200" dirty="0">
-                <a:solidFill>
-                  <a:srgbClr val="1C2833"/>
-                </a:solidFill>
-                <a:latin typeface="Arial" pitchFamily="34" charset="0"/>
-                <a:ea typeface="Arial" pitchFamily="34" charset="-122"/>
-                <a:cs typeface="Arial" pitchFamily="34" charset="-120"/>
-              </a:rPr>
-              <a:t>In pairs:</a:t>
-            </a:r>
-            <a:endParaRPr lang="en-US" sz="1200" dirty="0"/>
-          </a:p>
-        </p:txBody>
-      </p:sp>
-      <p:sp>
-        <p:nvSpPr>
-          <p:cNvPr id="5" name="Text 3"/>
-          <p:cNvSpPr/>
-          <p:nvPr/>
-        </p:nvSpPr>
-        <p:spPr>
-          <a:xfrm>
-            <a:off x="634901" y="1173063"/>
-            <a:ext cx="8102798" cy="1013222"/>
-          </a:xfrm>
-          <a:prstGeom prst="rect">
-            <a:avLst/>
-          </a:prstGeom>
-          <a:noFill/>
-          <a:ln/>
-        </p:spPr>
-        <p:txBody>
-          <a:bodyPr wrap="square" lIns="0" tIns="0" rIns="0" bIns="0" rtlCol="0" anchor="t"/>
-          <a:lstStyle/>
-          <a:p>
             <a:pPr algn="l" marL="342900" indent="-342900">
               <a:lnSpc>
                 <a:spcPts val="1620"/>
@@ -4088,7 +6883,27 @@
                 <a:ea typeface="Arial" pitchFamily="34" charset="-122"/>
                 <a:cs typeface="Arial" pitchFamily="34" charset="-120"/>
               </a:rPr>
-              <a:t>One partner is "Sun" (holds an imaginary torch in one direction).</a:t>
+              <a:t>Opening question on board: </a:t>
+            </a:r>
+            <a:pPr algn="l" indent="0" marL="0">
+              <a:lnSpc>
+                <a:spcPts val="1620"/>
+              </a:lnSpc>
+              <a:spcAft>
+                <a:spcPts val="300"/>
+              </a:spcAft>
+              <a:buNone/>
+            </a:pPr>
+            <a:r>
+              <a:rPr lang="en-US" sz="1200" i="1" dirty="0">
+                <a:solidFill>
+                  <a:srgbClr val="1C2833"/>
+                </a:solidFill>
+                <a:latin typeface="Arial" pitchFamily="34" charset="0"/>
+                <a:ea typeface="Arial" pitchFamily="34" charset="-122"/>
+                <a:cs typeface="Arial" pitchFamily="34" charset="-120"/>
+              </a:rPr>
+              <a:t>"Did you see the Moon last night? What shape was it?"</a:t>
             </a:r>
             <a:endParaRPr lang="en-US" sz="1200" dirty="0"/>
           </a:p>
@@ -4112,7 +6927,7 @@
                 <a:ea typeface="Arial" pitchFamily="34" charset="-122"/>
                 <a:cs typeface="Arial" pitchFamily="34" charset="-120"/>
               </a:rPr>
-              <a:t>The other is "Earth" (stays still).</a:t>
+              <a:t>Take 4–5 students' answers. Sketch each shape they describe on the board (don't correct yet — just record).</a:t>
             </a:r>
             <a:endParaRPr lang="en-US" sz="1200" dirty="0"/>
           </a:p>
@@ -4128,143 +6943,23 @@
               <a:buChar char="•"/>
             </a:pPr>
             <a:r>
-              <a:rPr lang="en-US" sz="1200" dirty="0">
-                <a:solidFill>
-                  <a:srgbClr val="1C2833"/>
-                </a:solidFill>
-                <a:latin typeface="Arial" pitchFamily="34" charset="0"/>
-                <a:ea typeface="Arial" pitchFamily="34" charset="-122"/>
-                <a:cs typeface="Arial" pitchFamily="34" charset="-120"/>
-              </a:rPr>
-              <a:t>Take a small ball or a balled-up paper and walk it around Earth in 8 stopping positions.</a:t>
+              <a:rPr lang="en-US" sz="1200" i="1" dirty="0">
+                <a:solidFill>
+                  <a:srgbClr val="1C2833"/>
+                </a:solidFill>
+                <a:latin typeface="Arial" pitchFamily="34" charset="0"/>
+                <a:ea typeface="Arial" pitchFamily="34" charset="-122"/>
+                <a:cs typeface="Arial" pitchFamily="34" charset="-120"/>
+              </a:rPr>
+              <a:t>"Why is it sometimes a full circle, sometimes a thin sliver, sometimes nothing at all? That's what this module answers."</a:t>
             </a:r>
             <a:endParaRPr lang="en-US" sz="1200" dirty="0"/>
           </a:p>
-          <a:p>
-            <a:pPr algn="l" marL="342900" indent="-342900">
-              <a:lnSpc>
-                <a:spcPts val="1620"/>
-              </a:lnSpc>
-              <a:spcAft>
-                <a:spcPts val="300"/>
-              </a:spcAft>
-              <a:buSzPct val="100000"/>
-              <a:buChar char="•"/>
-            </a:pPr>
-            <a:r>
-              <a:rPr lang="en-US" sz="1200" dirty="0">
-                <a:solidFill>
-                  <a:srgbClr val="1C2833"/>
-                </a:solidFill>
-                <a:latin typeface="Arial" pitchFamily="34" charset="0"/>
-                <a:ea typeface="Arial" pitchFamily="34" charset="-122"/>
-                <a:cs typeface="Arial" pitchFamily="34" charset="-120"/>
-              </a:rPr>
-              <a:t>At each position, the Earth-partner sketches what shape they see in their notebook.</a:t>
-            </a:r>
-            <a:endParaRPr lang="en-US" sz="1200" dirty="0"/>
-          </a:p>
-        </p:txBody>
-      </p:sp>
-      <p:sp>
-        <p:nvSpPr>
-          <p:cNvPr id="6" name="Text 4"/>
-          <p:cNvSpPr/>
-          <p:nvPr/>
-        </p:nvSpPr>
-        <p:spPr>
-          <a:xfrm>
-            <a:off x="406301" y="2275136"/>
-            <a:ext cx="8498026" cy="213271"/>
-          </a:xfrm>
-          <a:prstGeom prst="rect">
-            <a:avLst/>
-          </a:prstGeom>
-          <a:noFill/>
-          <a:ln/>
-        </p:spPr>
-        <p:txBody>
-          <a:bodyPr wrap="square" lIns="0" tIns="0" rIns="0" bIns="0" rtlCol="0" anchor="t"/>
-          <a:lstStyle/>
-          <a:p>
-            <a:pPr algn="l" indent="0" marL="0">
-              <a:lnSpc>
-                <a:spcPts val="1680"/>
-              </a:lnSpc>
-              <a:spcBef>
-                <a:spcPts val="300"/>
-              </a:spcBef>
-              <a:spcAft>
-                <a:spcPts val="300"/>
-              </a:spcAft>
-              <a:buNone/>
-            </a:pPr>
-            <a:r>
-              <a:rPr lang="en-US" sz="1200" dirty="0">
-                <a:solidFill>
-                  <a:srgbClr val="1C2833"/>
-                </a:solidFill>
-                <a:latin typeface="Arial" pitchFamily="34" charset="0"/>
-                <a:ea typeface="Arial" pitchFamily="34" charset="-122"/>
-                <a:cs typeface="Arial" pitchFamily="34" charset="-120"/>
-              </a:rPr>
-              <a:t>After 7 minutes, swap roles.</a:t>
-            </a:r>
-            <a:endParaRPr lang="en-US" sz="1200" dirty="0"/>
-          </a:p>
-        </p:txBody>
-      </p:sp>
-      <p:sp>
-        <p:nvSpPr>
-          <p:cNvPr id="7" name="Text 5"/>
-          <p:cNvSpPr/>
-          <p:nvPr/>
-        </p:nvSpPr>
-        <p:spPr>
-          <a:xfrm>
-            <a:off x="406301" y="2564606"/>
-            <a:ext cx="8498026" cy="426541"/>
-          </a:xfrm>
-          <a:prstGeom prst="rect">
-            <a:avLst/>
-          </a:prstGeom>
-          <a:noFill/>
-          <a:ln/>
-        </p:spPr>
-        <p:txBody>
-          <a:bodyPr wrap="square" lIns="0" tIns="0" rIns="0" bIns="0" rtlCol="0" anchor="t"/>
-          <a:lstStyle/>
-          <a:p>
-            <a:pPr algn="l" indent="0" marL="0">
-              <a:lnSpc>
-                <a:spcPts val="1680"/>
-              </a:lnSpc>
-              <a:spcBef>
-                <a:spcPts val="300"/>
-              </a:spcBef>
-              <a:spcAft>
-                <a:spcPts val="300"/>
-              </a:spcAft>
-              <a:buNone/>
-            </a:pPr>
-            <a:r>
-              <a:rPr lang="en-US" sz="1200" dirty="0">
-                <a:solidFill>
-                  <a:srgbClr val="1C2833"/>
-                </a:solidFill>
-                <a:latin typeface="Arial" pitchFamily="34" charset="0"/>
-                <a:ea typeface="Arial" pitchFamily="34" charset="-122"/>
-                <a:cs typeface="Arial" pitchFamily="34" charset="-120"/>
-              </a:rPr>
-              <a:t>By end of activity, each student has 8 small Moon-shape sketches in their notebook labelled new, waxing crescent, first quarter, waxing gibbous, full, waning gibbous, last quarter, waning crescent.</a:t>
-            </a:r>
-            <a:endParaRPr lang="en-US" sz="1200" dirty="0"/>
-          </a:p>
-        </p:txBody>
-      </p:sp>
-      <p:sp>
-        <p:nvSpPr>
-          <p:cNvPr id="8" name="Text 6"/>
+        </p:txBody>
+      </p:sp>
+      <p:sp>
+        <p:nvSpPr>
+          <p:cNvPr id="5" name="Text 3"/>
           <p:cNvSpPr/>
           <p:nvPr/>
         </p:nvSpPr>
@@ -4414,7 +7109,7 @@
                 <a:ea typeface="Georgia" pitchFamily="34" charset="-122"/>
                 <a:cs typeface="Georgia" pitchFamily="34" charset="-120"/>
               </a:rPr>
-              <a:t>Wrap-up (5 min)</a:t>
+              <a:t>Core (20 min)</a:t>
             </a:r>
             <a:endParaRPr lang="en-US" sz="1800" dirty="0"/>
           </a:p>
@@ -4429,7 +7124,7 @@
         <p:spPr>
           <a:xfrm>
             <a:off x="634901" y="883593"/>
-            <a:ext cx="8102798" cy="281880"/>
+            <a:ext cx="8102798" cy="693241"/>
           </a:xfrm>
           <a:prstGeom prst="rect">
             <a:avLst/>
@@ -4460,7 +7155,7 @@
                 <a:ea typeface="Arial" pitchFamily="34" charset="-122"/>
                 <a:cs typeface="Arial" pitchFamily="34" charset="-120"/>
               </a:rPr>
-              <a:t>Exit ticket on a slip of paper, 2 min:</a:t>
+              <a:t>The Moon is a ball lit by the Sun.</a:t>
             </a:r>
             <a:pPr algn="l" indent="0" marL="0">
               <a:lnSpc>
@@ -4480,7 +7175,7 @@
                 <a:ea typeface="Arial" pitchFamily="34" charset="-122"/>
                 <a:cs typeface="Arial" pitchFamily="34" charset="-120"/>
               </a:rPr>
-              <a:t> </a:t>
+              <a:t> Hold up the white ball. </a:t>
             </a:r>
             <a:pPr algn="l" indent="0" marL="0">
               <a:lnSpc>
@@ -4500,7 +7195,47 @@
                 <a:ea typeface="Arial" pitchFamily="34" charset="-122"/>
                 <a:cs typeface="Arial" pitchFamily="34" charset="-120"/>
               </a:rPr>
-              <a:t>"In one sentence: why does the Moon look different on different nights?"</a:t>
+              <a:t>"This is the Moon — a rocky sphere, about a quarter the size of the Earth."</a:t>
+            </a:r>
+            <a:pPr algn="l" indent="0" marL="0">
+              <a:lnSpc>
+                <a:spcPts val="1620"/>
+              </a:lnSpc>
+              <a:spcAft>
+                <a:spcPts val="300"/>
+              </a:spcAft>
+              <a:buNone/>
+            </a:pPr>
+            <a:r>
+              <a:rPr lang="en-US" sz="1200" dirty="0">
+                <a:solidFill>
+                  <a:srgbClr val="1C2833"/>
+                </a:solidFill>
+                <a:latin typeface="Arial" pitchFamily="34" charset="0"/>
+                <a:ea typeface="Arial" pitchFamily="34" charset="-122"/>
+                <a:cs typeface="Arial" pitchFamily="34" charset="-120"/>
+              </a:rPr>
+              <a:t> Shine the torch on it from one side. </a:t>
+            </a:r>
+            <a:pPr algn="l" indent="0" marL="0">
+              <a:lnSpc>
+                <a:spcPts val="1620"/>
+              </a:lnSpc>
+              <a:spcAft>
+                <a:spcPts val="300"/>
+              </a:spcAft>
+              <a:buNone/>
+            </a:pPr>
+            <a:r>
+              <a:rPr lang="en-US" sz="1200" i="1" dirty="0">
+                <a:solidFill>
+                  <a:srgbClr val="1C2833"/>
+                </a:solidFill>
+                <a:latin typeface="Arial" pitchFamily="34" charset="0"/>
+                <a:ea typeface="Arial" pitchFamily="34" charset="-122"/>
+                <a:cs typeface="Arial" pitchFamily="34" charset="-120"/>
+              </a:rPr>
+              <a:t>"The Sun lights up only one half of the Moon. Always. Half is day, half is night."</a:t>
             </a:r>
             <a:endParaRPr lang="en-US" sz="1200" dirty="0"/>
           </a:p>
@@ -4514,8 +7249,8 @@
         </p:nvSpPr>
         <p:spPr>
           <a:xfrm>
-            <a:off x="406301" y="1254323"/>
-            <a:ext cx="8498026" cy="426541"/>
+            <a:off x="634901" y="1678335"/>
+            <a:ext cx="8102798" cy="693241"/>
           </a:xfrm>
           <a:prstGeom prst="rect">
             <a:avLst/>
@@ -4527,100 +7262,6 @@
           <a:bodyPr wrap="square" lIns="0" tIns="0" rIns="0" bIns="0" rtlCol="0" anchor="t"/>
           <a:lstStyle/>
           <a:p>
-            <a:pPr algn="l" indent="0" marL="0">
-              <a:lnSpc>
-                <a:spcPts val="1680"/>
-              </a:lnSpc>
-              <a:spcBef>
-                <a:spcPts val="300"/>
-              </a:spcBef>
-              <a:spcAft>
-                <a:spcPts val="300"/>
-              </a:spcAft>
-              <a:buNone/>
-            </a:pPr>
-            <a:r>
-              <a:rPr lang="en-US" sz="1200" dirty="0">
-                <a:solidFill>
-                  <a:srgbClr val="1C2833"/>
-                </a:solidFill>
-                <a:latin typeface="Arial" pitchFamily="34" charset="0"/>
-                <a:ea typeface="Arial" pitchFamily="34" charset="-122"/>
-                <a:cs typeface="Arial" pitchFamily="34" charset="-120"/>
-              </a:rPr>
-              <a:t>– Collect. Read 3 aloud quickly. Correct any "Earth's shadow makes the phases" answers gently — Earth's shadow only matters for </a:t>
-            </a:r>
-            <a:pPr algn="l" indent="0" marL="0">
-              <a:lnSpc>
-                <a:spcPts val="1680"/>
-              </a:lnSpc>
-              <a:spcBef>
-                <a:spcPts val="300"/>
-              </a:spcBef>
-              <a:spcAft>
-                <a:spcPts val="300"/>
-              </a:spcAft>
-              <a:buNone/>
-            </a:pPr>
-            <a:r>
-              <a:rPr lang="en-US" sz="1200" i="1" dirty="0">
-                <a:solidFill>
-                  <a:srgbClr val="1C2833"/>
-                </a:solidFill>
-                <a:latin typeface="Arial" pitchFamily="34" charset="0"/>
-                <a:ea typeface="Arial" pitchFamily="34" charset="-122"/>
-                <a:cs typeface="Arial" pitchFamily="34" charset="-120"/>
-              </a:rPr>
-              <a:t>eclipses</a:t>
-            </a:r>
-            <a:pPr algn="l" indent="0" marL="0">
-              <a:lnSpc>
-                <a:spcPts val="1680"/>
-              </a:lnSpc>
-              <a:spcBef>
-                <a:spcPts val="300"/>
-              </a:spcBef>
-              <a:spcAft>
-                <a:spcPts val="300"/>
-              </a:spcAft>
-              <a:buNone/>
-            </a:pPr>
-            <a:r>
-              <a:rPr lang="en-US" sz="1200" dirty="0">
-                <a:solidFill>
-                  <a:srgbClr val="1C2833"/>
-                </a:solidFill>
-                <a:latin typeface="Arial" pitchFamily="34" charset="0"/>
-                <a:ea typeface="Arial" pitchFamily="34" charset="-122"/>
-                <a:cs typeface="Arial" pitchFamily="34" charset="-120"/>
-              </a:rPr>
-              <a:t> (Day 7).</a:t>
-            </a:r>
-            <a:endParaRPr lang="en-US" sz="1200" dirty="0"/>
-          </a:p>
-        </p:txBody>
-      </p:sp>
-      <p:sp>
-        <p:nvSpPr>
-          <p:cNvPr id="6" name="Text 4"/>
-          <p:cNvSpPr/>
-          <p:nvPr/>
-        </p:nvSpPr>
-        <p:spPr>
-          <a:xfrm>
-            <a:off x="634901" y="1769715"/>
-            <a:ext cx="8102798" cy="487561"/>
-          </a:xfrm>
-          <a:prstGeom prst="rect">
-            <a:avLst/>
-          </a:prstGeom>
-          <a:noFill/>
-          <a:ln/>
-        </p:spPr>
-        <p:txBody>
-          <a:bodyPr wrap="square" lIns="0" tIns="0" rIns="0" bIns="0" rtlCol="0" anchor="t"/>
-          <a:lstStyle/>
-          <a:p>
             <a:pPr algn="l" marL="342900" indent="-342900">
               <a:lnSpc>
                 <a:spcPts val="1620"/>
@@ -4640,7 +7281,7 @@
                 <a:ea typeface="Arial" pitchFamily="34" charset="-122"/>
                 <a:cs typeface="Arial" pitchFamily="34" charset="-120"/>
               </a:rPr>
-              <a:t>Tonight's homework:</a:t>
+              <a:t>Why the shape changes — the demo.</a:t>
             </a:r>
             <a:pPr algn="l" indent="0" marL="0">
               <a:lnSpc>
@@ -4660,47 +7301,7 @@
                 <a:ea typeface="Arial" pitchFamily="34" charset="-122"/>
                 <a:cs typeface="Arial" pitchFamily="34" charset="-120"/>
               </a:rPr>
-              <a:t> Look at the Moon. Note the date, the time, the shape (sketch). Write down the cloud condition. This starts your </a:t>
-            </a:r>
-            <a:pPr algn="l" indent="0" marL="0">
-              <a:lnSpc>
-                <a:spcPts val="1620"/>
-              </a:lnSpc>
-              <a:spcAft>
-                <a:spcPts val="300"/>
-              </a:spcAft>
-              <a:buNone/>
-            </a:pPr>
-            <a:r>
-              <a:rPr lang="en-US" sz="1200" b="1" dirty="0">
-                <a:solidFill>
-                  <a:srgbClr val="1C2833"/>
-                </a:solidFill>
-                <a:latin typeface="Arial" pitchFamily="34" charset="0"/>
-                <a:ea typeface="Arial" pitchFamily="34" charset="-122"/>
-                <a:cs typeface="Arial" pitchFamily="34" charset="-120"/>
-              </a:rPr>
-              <a:t>10-night Moon diary</a:t>
-            </a:r>
-            <a:pPr algn="l" indent="0" marL="0">
-              <a:lnSpc>
-                <a:spcPts val="1620"/>
-              </a:lnSpc>
-              <a:spcAft>
-                <a:spcPts val="300"/>
-              </a:spcAft>
-              <a:buNone/>
-            </a:pPr>
-            <a:r>
-              <a:rPr lang="en-US" sz="1200" dirty="0">
-                <a:solidFill>
-                  <a:srgbClr val="1C2833"/>
-                </a:solidFill>
-                <a:latin typeface="Arial" pitchFamily="34" charset="0"/>
-                <a:ea typeface="Arial" pitchFamily="34" charset="-122"/>
-                <a:cs typeface="Arial" pitchFamily="34" charset="-120"/>
-              </a:rPr>
-              <a:t>.</a:t>
+              <a:t> Have one student stand still in the centre of the room (= Earth). One student stands ~3 m away holding the torch on (= Sun). You walk slowly around the Earth-student in a wide circle, holding the ball at arm's length so the Earth-student can see it.</a:t>
             </a:r>
             <a:endParaRPr lang="en-US" sz="1200" dirty="0"/>
           </a:p>
@@ -4708,7 +7309,7 @@
       </p:sp>
       <p:sp>
         <p:nvSpPr>
-          <p:cNvPr id="7" name="Text 5"/>
+          <p:cNvPr id="6" name="Text 4"/>
           <p:cNvSpPr/>
           <p:nvPr/>
         </p:nvSpPr>
@@ -4858,7 +7459,7 @@
                 <a:ea typeface="Georgia" pitchFamily="34" charset="-122"/>
                 <a:cs typeface="Georgia" pitchFamily="34" charset="-120"/>
               </a:rPr>
-              <a:t>Student-facing content</a:t>
+              <a:t>Core (20 min) (cont.)</a:t>
             </a:r>
             <a:endParaRPr lang="en-US" sz="1800" dirty="0"/>
           </a:p>
@@ -4872,61 +7473,8 @@
         </p:nvSpPr>
         <p:spPr>
           <a:xfrm>
-            <a:off x="406301" y="883593"/>
-            <a:ext cx="8331398" cy="1843088"/>
-          </a:xfrm>
-          <a:prstGeom prst="rect">
-            <a:avLst/>
-          </a:prstGeom>
-          <a:solidFill>
-            <a:srgbClr val="F4F8F9"/>
-          </a:solidFill>
-          <a:ln/>
-        </p:spPr>
-        <p:txBody>
-          <a:bodyPr wrap="square" rtlCol="0" anchor="ctr"/>
-          <a:lstStyle/>
-          <a:p>
-            <a:pPr indent="0" marL="0">
-              <a:buNone/>
-            </a:pPr>
-            <a:endParaRPr lang="en-US" dirty="0"/>
-          </a:p>
-        </p:txBody>
-      </p:sp>
-      <p:sp>
-        <p:nvSpPr>
-          <p:cNvPr id="5" name="Shape 3"/>
-          <p:cNvSpPr/>
-          <p:nvPr/>
-        </p:nvSpPr>
-        <p:spPr>
-          <a:xfrm>
-            <a:off x="434876" y="883593"/>
-            <a:ext cx="0" cy="1843088"/>
-          </a:xfrm>
-          <a:prstGeom prst="line">
-            <a:avLst/>
-          </a:prstGeom>
-          <a:noFill/>
-          <a:ln w="57150">
-            <a:solidFill>
-              <a:srgbClr val="FE4447"/>
-            </a:solidFill>
-            <a:prstDash val="solid"/>
-          </a:ln>
-        </p:spPr>
-      </p:sp>
-      <p:sp>
-        <p:nvSpPr>
-          <p:cNvPr id="6" name="Text 4"/>
-          <p:cNvSpPr/>
-          <p:nvPr/>
-        </p:nvSpPr>
-        <p:spPr>
-          <a:xfrm>
-            <a:off x="692051" y="1074093"/>
-            <a:ext cx="7973389" cy="230981"/>
+            <a:off x="406301" y="870942"/>
+            <a:ext cx="8498026" cy="213271"/>
           </a:xfrm>
           <a:prstGeom prst="rect">
             <a:avLst/>
@@ -4940,7 +7488,7 @@
           <a:p>
             <a:pPr algn="l" indent="0" marL="0">
               <a:lnSpc>
-                <a:spcPts val="1820"/>
+                <a:spcPts val="1680"/>
               </a:lnSpc>
               <a:spcBef>
                 <a:spcPts val="300"/>
@@ -4951,44 +7499,19 @@
               <a:buNone/>
             </a:pPr>
             <a:r>
-              <a:rPr lang="en-US" sz="1300" b="1" i="1" dirty="0">
-                <a:solidFill>
-                  <a:srgbClr val="1C2833"/>
-                </a:solidFill>
-                <a:latin typeface="Georgia" pitchFamily="34" charset="0"/>
-                <a:ea typeface="Georgia" pitchFamily="34" charset="-122"/>
-                <a:cs typeface="Georgia" pitchFamily="34" charset="-120"/>
-              </a:rPr>
-              <a:t>The Moon does not change. Our view of it changes.</a:t>
-            </a:r>
-            <a:endParaRPr lang="en-US" sz="1300" dirty="0"/>
-          </a:p>
-        </p:txBody>
-      </p:sp>
-      <p:sp>
-        <p:nvSpPr>
-          <p:cNvPr id="7" name="Text 5"/>
-          <p:cNvSpPr/>
-          <p:nvPr/>
-        </p:nvSpPr>
-        <p:spPr>
-          <a:xfrm>
-            <a:off x="692051" y="1343174"/>
-            <a:ext cx="7973389" cy="692944"/>
-          </a:xfrm>
-          <a:prstGeom prst="rect">
-            <a:avLst/>
-          </a:prstGeom>
-          <a:noFill/>
-          <a:ln/>
-        </p:spPr>
-        <p:txBody>
-          <a:bodyPr wrap="square" lIns="0" tIns="0" rIns="0" bIns="0" rtlCol="0" anchor="t"/>
-          <a:lstStyle/>
-          <a:p>
-            <a:pPr algn="l" indent="0" marL="0">
-              <a:lnSpc>
-                <a:spcPts val="1820"/>
+              <a:rPr lang="en-US" sz="1200" dirty="0">
+                <a:solidFill>
+                  <a:srgbClr val="1C2833"/>
+                </a:solidFill>
+                <a:latin typeface="Arial" pitchFamily="34" charset="0"/>
+                <a:ea typeface="Arial" pitchFamily="34" charset="-122"/>
+                <a:cs typeface="Arial" pitchFamily="34" charset="-120"/>
+              </a:rPr>
+              <a:t>At each of 8 stopping points, ask: </a:t>
+            </a:r>
+            <a:pPr algn="l" indent="0" marL="0">
+              <a:lnSpc>
+                <a:spcPts val="1680"/>
               </a:lnSpc>
               <a:spcBef>
                 <a:spcPts val="300"/>
@@ -4999,117 +7522,23 @@
               <a:buNone/>
             </a:pPr>
             <a:r>
-              <a:rPr lang="en-US" sz="1300" i="1" dirty="0">
-                <a:solidFill>
-                  <a:srgbClr val="1C2833"/>
-                </a:solidFill>
-                <a:latin typeface="Georgia" pitchFamily="34" charset="0"/>
-                <a:ea typeface="Georgia" pitchFamily="34" charset="-122"/>
-                <a:cs typeface="Georgia" pitchFamily="34" charset="-120"/>
-              </a:rPr>
-              <a:t>The Sun lights up half of the Moon. As the Moon orbits Earth, we see different fractions of that lit half. Over ~29.5 days, the visible fraction grows from nothing (new moon), to a half-disc (quarter), to a full disc (full moon), back to a half, and back to nothing.</a:t>
-            </a:r>
-            <a:endParaRPr lang="en-US" sz="1300" dirty="0"/>
-          </a:p>
-        </p:txBody>
-      </p:sp>
-      <p:sp>
-        <p:nvSpPr>
-          <p:cNvPr id="8" name="Text 6"/>
-          <p:cNvSpPr/>
-          <p:nvPr/>
-        </p:nvSpPr>
-        <p:spPr>
-          <a:xfrm>
-            <a:off x="692051" y="2074218"/>
-            <a:ext cx="7973389" cy="461963"/>
-          </a:xfrm>
-          <a:prstGeom prst="rect">
-            <a:avLst/>
-          </a:prstGeom>
-          <a:noFill/>
-          <a:ln/>
-        </p:spPr>
-        <p:txBody>
-          <a:bodyPr wrap="square" lIns="0" tIns="0" rIns="0" bIns="0" rtlCol="0" anchor="t"/>
-          <a:lstStyle/>
-          <a:p>
-            <a:pPr algn="l" indent="0" marL="0">
-              <a:lnSpc>
-                <a:spcPts val="1820"/>
-              </a:lnSpc>
-              <a:spcBef>
-                <a:spcPts val="300"/>
-              </a:spcBef>
-              <a:spcAft>
-                <a:spcPts val="300"/>
-              </a:spcAft>
-              <a:buNone/>
-            </a:pPr>
-            <a:r>
-              <a:rPr lang="en-US" sz="1300" dirty="0">
-                <a:solidFill>
-                  <a:srgbClr val="1C2833"/>
-                </a:solidFill>
-                <a:latin typeface="Georgia" pitchFamily="34" charset="0"/>
-                <a:ea typeface="Georgia" pitchFamily="34" charset="-122"/>
-                <a:cs typeface="Georgia" pitchFamily="34" charset="-120"/>
-              </a:rPr>
-              <a:t>This 29.5-day cycle is called the </a:t>
-            </a:r>
-            <a:pPr algn="l" indent="0" marL="0">
-              <a:lnSpc>
-                <a:spcPts val="1820"/>
-              </a:lnSpc>
-              <a:spcBef>
-                <a:spcPts val="300"/>
-              </a:spcBef>
-              <a:spcAft>
-                <a:spcPts val="300"/>
-              </a:spcAft>
-              <a:buNone/>
-            </a:pPr>
-            <a:r>
-              <a:rPr lang="en-US" sz="1300" b="1" i="1" dirty="0">
-                <a:solidFill>
-                  <a:srgbClr val="1C2833"/>
-                </a:solidFill>
-                <a:latin typeface="Georgia" pitchFamily="34" charset="0"/>
-                <a:ea typeface="Georgia" pitchFamily="34" charset="-122"/>
-                <a:cs typeface="Georgia" pitchFamily="34" charset="-120"/>
-              </a:rPr>
-              <a:t>synodic month</a:t>
-            </a:r>
-            <a:pPr algn="l" indent="0" marL="0">
-              <a:lnSpc>
-                <a:spcPts val="1820"/>
-              </a:lnSpc>
-              <a:spcBef>
-                <a:spcPts val="300"/>
-              </a:spcBef>
-              <a:spcAft>
-                <a:spcPts val="300"/>
-              </a:spcAft>
-              <a:buNone/>
-            </a:pPr>
-            <a:r>
-              <a:rPr lang="en-US" sz="1300" dirty="0">
-                <a:solidFill>
-                  <a:srgbClr val="1C2833"/>
-                </a:solidFill>
-                <a:latin typeface="Georgia" pitchFamily="34" charset="0"/>
-                <a:ea typeface="Georgia" pitchFamily="34" charset="-122"/>
-                <a:cs typeface="Georgia" pitchFamily="34" charset="-120"/>
-              </a:rPr>
-              <a:t> — the basis of the lunar calendar that we'll study in this module.</a:t>
-            </a:r>
-            <a:endParaRPr lang="en-US" sz="1300" dirty="0"/>
-          </a:p>
-        </p:txBody>
-      </p:sp>
-      <p:sp>
-        <p:nvSpPr>
-          <p:cNvPr id="9" name="Text 7"/>
+              <a:rPr lang="en-US" sz="1200" i="1" dirty="0">
+                <a:solidFill>
+                  <a:srgbClr val="1C2833"/>
+                </a:solidFill>
+                <a:latin typeface="Arial" pitchFamily="34" charset="0"/>
+                <a:ea typeface="Arial" pitchFamily="34" charset="-122"/>
+                <a:cs typeface="Arial" pitchFamily="34" charset="-120"/>
+              </a:rPr>
+              <a:t>"What fraction of the lit half of the ball can Earth see?"</a:t>
+            </a:r>
+            <a:endParaRPr lang="en-US" sz="1200" dirty="0"/>
+          </a:p>
+        </p:txBody>
+      </p:sp>
+      <p:sp>
+        <p:nvSpPr>
+          <p:cNvPr id="5" name="Text 3"/>
           <p:cNvSpPr/>
           <p:nvPr/>
         </p:nvSpPr>
@@ -5259,7 +7688,7 @@
                 <a:ea typeface="Georgia" pitchFamily="34" charset="-122"/>
                 <a:cs typeface="Georgia" pitchFamily="34" charset="-120"/>
               </a:rPr>
-              <a:t>Homework</a:t>
+              <a:t>Core (20 min) (cont.)</a:t>
             </a:r>
             <a:endParaRPr lang="en-US" sz="1800" dirty="0"/>
           </a:p>
@@ -5274,7 +7703,7 @@
         <p:spPr>
           <a:xfrm>
             <a:off x="634901" y="883593"/>
-            <a:ext cx="8102798" cy="693241"/>
+            <a:ext cx="8102798" cy="1500783"/>
           </a:xfrm>
           <a:prstGeom prst="rect">
             <a:avLst/>
@@ -5305,7 +7734,7 @@
                 <a:ea typeface="Arial" pitchFamily="34" charset="-122"/>
                 <a:cs typeface="Arial" pitchFamily="34" charset="-120"/>
               </a:rPr>
-              <a:t>Tonight (and every night for 10 nights):</a:t>
+              <a:t>Position 1 (Moon between Earth and Sun):</a:t>
             </a:r>
             <a:pPr algn="l" indent="0" marL="0">
               <a:lnSpc>
@@ -5325,7 +7754,347 @@
                 <a:ea typeface="Arial" pitchFamily="34" charset="-122"/>
                 <a:cs typeface="Arial" pitchFamily="34" charset="-120"/>
               </a:rPr>
-              <a:t> Look at the Moon. Sketch its shape in your workbook. Note the date, the time, and "clear / partly cloudy / overcast." If overcast, look it up on a Moon-phase app or NASA's published phase calendar.</a:t>
+              <a:t> Earth sees the dark side. → </a:t>
+            </a:r>
+            <a:pPr algn="l" indent="0" marL="0">
+              <a:lnSpc>
+                <a:spcPts val="1620"/>
+              </a:lnSpc>
+              <a:spcAft>
+                <a:spcPts val="300"/>
+              </a:spcAft>
+              <a:buNone/>
+            </a:pPr>
+            <a:r>
+              <a:rPr lang="en-US" sz="1200" i="1" dirty="0">
+                <a:solidFill>
+                  <a:srgbClr val="1C2833"/>
+                </a:solidFill>
+                <a:latin typeface="Arial" pitchFamily="34" charset="0"/>
+                <a:ea typeface="Arial" pitchFamily="34" charset="-122"/>
+                <a:cs typeface="Arial" pitchFamily="34" charset="-120"/>
+              </a:rPr>
+              <a:t>new moon</a:t>
+            </a:r>
+            <a:endParaRPr lang="en-US" sz="1200" dirty="0"/>
+          </a:p>
+          <a:p>
+            <a:pPr algn="l" marL="342900" indent="-342900">
+              <a:lnSpc>
+                <a:spcPts val="1620"/>
+              </a:lnSpc>
+              <a:spcAft>
+                <a:spcPts val="300"/>
+              </a:spcAft>
+              <a:buSzPct val="100000"/>
+              <a:buChar char="•"/>
+            </a:pPr>
+            <a:r>
+              <a:rPr lang="en-US" sz="1200" b="1" dirty="0">
+                <a:solidFill>
+                  <a:srgbClr val="1C2833"/>
+                </a:solidFill>
+                <a:latin typeface="Arial" pitchFamily="34" charset="0"/>
+                <a:ea typeface="Arial" pitchFamily="34" charset="-122"/>
+                <a:cs typeface="Arial" pitchFamily="34" charset="-120"/>
+              </a:rPr>
+              <a:t>Position 2 (45° on):</a:t>
+            </a:r>
+            <a:pPr algn="l" indent="0" marL="0">
+              <a:lnSpc>
+                <a:spcPts val="1620"/>
+              </a:lnSpc>
+              <a:spcAft>
+                <a:spcPts val="300"/>
+              </a:spcAft>
+              <a:buNone/>
+            </a:pPr>
+            <a:r>
+              <a:rPr lang="en-US" sz="1200" dirty="0">
+                <a:solidFill>
+                  <a:srgbClr val="1C2833"/>
+                </a:solidFill>
+                <a:latin typeface="Arial" pitchFamily="34" charset="0"/>
+                <a:ea typeface="Arial" pitchFamily="34" charset="-122"/>
+                <a:cs typeface="Arial" pitchFamily="34" charset="-120"/>
+              </a:rPr>
+              <a:t> A thin sliver visible on one side. → </a:t>
+            </a:r>
+            <a:pPr algn="l" indent="0" marL="0">
+              <a:lnSpc>
+                <a:spcPts val="1620"/>
+              </a:lnSpc>
+              <a:spcAft>
+                <a:spcPts val="300"/>
+              </a:spcAft>
+              <a:buNone/>
+            </a:pPr>
+            <a:r>
+              <a:rPr lang="en-US" sz="1200" i="1" dirty="0">
+                <a:solidFill>
+                  <a:srgbClr val="1C2833"/>
+                </a:solidFill>
+                <a:latin typeface="Arial" pitchFamily="34" charset="0"/>
+                <a:ea typeface="Arial" pitchFamily="34" charset="-122"/>
+                <a:cs typeface="Arial" pitchFamily="34" charset="-120"/>
+              </a:rPr>
+              <a:t>waxing crescent</a:t>
+            </a:r>
+            <a:endParaRPr lang="en-US" sz="1200" dirty="0"/>
+          </a:p>
+          <a:p>
+            <a:pPr algn="l" marL="342900" indent="-342900">
+              <a:lnSpc>
+                <a:spcPts val="1620"/>
+              </a:lnSpc>
+              <a:spcAft>
+                <a:spcPts val="300"/>
+              </a:spcAft>
+              <a:buSzPct val="100000"/>
+              <a:buChar char="•"/>
+            </a:pPr>
+            <a:r>
+              <a:rPr lang="en-US" sz="1200" b="1" dirty="0">
+                <a:solidFill>
+                  <a:srgbClr val="1C2833"/>
+                </a:solidFill>
+                <a:latin typeface="Arial" pitchFamily="34" charset="0"/>
+                <a:ea typeface="Arial" pitchFamily="34" charset="-122"/>
+                <a:cs typeface="Arial" pitchFamily="34" charset="-120"/>
+              </a:rPr>
+              <a:t>Position 3 (90°):</a:t>
+            </a:r>
+            <a:pPr algn="l" indent="0" marL="0">
+              <a:lnSpc>
+                <a:spcPts val="1620"/>
+              </a:lnSpc>
+              <a:spcAft>
+                <a:spcPts val="300"/>
+              </a:spcAft>
+              <a:buNone/>
+            </a:pPr>
+            <a:r>
+              <a:rPr lang="en-US" sz="1200" dirty="0">
+                <a:solidFill>
+                  <a:srgbClr val="1C2833"/>
+                </a:solidFill>
+                <a:latin typeface="Arial" pitchFamily="34" charset="0"/>
+                <a:ea typeface="Arial" pitchFamily="34" charset="-122"/>
+                <a:cs typeface="Arial" pitchFamily="34" charset="-120"/>
+              </a:rPr>
+              <a:t> Half of the disc visible. → </a:t>
+            </a:r>
+            <a:pPr algn="l" indent="0" marL="0">
+              <a:lnSpc>
+                <a:spcPts val="1620"/>
+              </a:lnSpc>
+              <a:spcAft>
+                <a:spcPts val="300"/>
+              </a:spcAft>
+              <a:buNone/>
+            </a:pPr>
+            <a:r>
+              <a:rPr lang="en-US" sz="1200" i="1" dirty="0">
+                <a:solidFill>
+                  <a:srgbClr val="1C2833"/>
+                </a:solidFill>
+                <a:latin typeface="Arial" pitchFamily="34" charset="0"/>
+                <a:ea typeface="Arial" pitchFamily="34" charset="-122"/>
+                <a:cs typeface="Arial" pitchFamily="34" charset="-120"/>
+              </a:rPr>
+              <a:t>first quarter</a:t>
+            </a:r>
+            <a:endParaRPr lang="en-US" sz="1200" dirty="0"/>
+          </a:p>
+          <a:p>
+            <a:pPr algn="l" marL="342900" indent="-342900">
+              <a:lnSpc>
+                <a:spcPts val="1620"/>
+              </a:lnSpc>
+              <a:spcAft>
+                <a:spcPts val="300"/>
+              </a:spcAft>
+              <a:buSzPct val="100000"/>
+              <a:buChar char="•"/>
+            </a:pPr>
+            <a:r>
+              <a:rPr lang="en-US" sz="1200" b="1" dirty="0">
+                <a:solidFill>
+                  <a:srgbClr val="1C2833"/>
+                </a:solidFill>
+                <a:latin typeface="Arial" pitchFamily="34" charset="0"/>
+                <a:ea typeface="Arial" pitchFamily="34" charset="-122"/>
+                <a:cs typeface="Arial" pitchFamily="34" charset="-120"/>
+              </a:rPr>
+              <a:t>Position 4 (135°):</a:t>
+            </a:r>
+            <a:pPr algn="l" indent="0" marL="0">
+              <a:lnSpc>
+                <a:spcPts val="1620"/>
+              </a:lnSpc>
+              <a:spcAft>
+                <a:spcPts val="300"/>
+              </a:spcAft>
+              <a:buNone/>
+            </a:pPr>
+            <a:r>
+              <a:rPr lang="en-US" sz="1200" dirty="0">
+                <a:solidFill>
+                  <a:srgbClr val="1C2833"/>
+                </a:solidFill>
+                <a:latin typeface="Arial" pitchFamily="34" charset="0"/>
+                <a:ea typeface="Arial" pitchFamily="34" charset="-122"/>
+                <a:cs typeface="Arial" pitchFamily="34" charset="-120"/>
+              </a:rPr>
+              <a:t> Most of the disc visible. → </a:t>
+            </a:r>
+            <a:pPr algn="l" indent="0" marL="0">
+              <a:lnSpc>
+                <a:spcPts val="1620"/>
+              </a:lnSpc>
+              <a:spcAft>
+                <a:spcPts val="300"/>
+              </a:spcAft>
+              <a:buNone/>
+            </a:pPr>
+            <a:r>
+              <a:rPr lang="en-US" sz="1200" i="1" dirty="0">
+                <a:solidFill>
+                  <a:srgbClr val="1C2833"/>
+                </a:solidFill>
+                <a:latin typeface="Arial" pitchFamily="34" charset="0"/>
+                <a:ea typeface="Arial" pitchFamily="34" charset="-122"/>
+                <a:cs typeface="Arial" pitchFamily="34" charset="-120"/>
+              </a:rPr>
+              <a:t>waxing gibbous</a:t>
+            </a:r>
+            <a:endParaRPr lang="en-US" sz="1200" dirty="0"/>
+          </a:p>
+          <a:p>
+            <a:pPr algn="l" marL="342900" indent="-342900">
+              <a:lnSpc>
+                <a:spcPts val="1620"/>
+              </a:lnSpc>
+              <a:spcAft>
+                <a:spcPts val="300"/>
+              </a:spcAft>
+              <a:buSzPct val="100000"/>
+              <a:buChar char="•"/>
+            </a:pPr>
+            <a:r>
+              <a:rPr lang="en-US" sz="1200" b="1" dirty="0">
+                <a:solidFill>
+                  <a:srgbClr val="1C2833"/>
+                </a:solidFill>
+                <a:latin typeface="Arial" pitchFamily="34" charset="0"/>
+                <a:ea typeface="Arial" pitchFamily="34" charset="-122"/>
+                <a:cs typeface="Arial" pitchFamily="34" charset="-120"/>
+              </a:rPr>
+              <a:t>Position 5 (Earth between Sun and Moon):</a:t>
+            </a:r>
+            <a:pPr algn="l" indent="0" marL="0">
+              <a:lnSpc>
+                <a:spcPts val="1620"/>
+              </a:lnSpc>
+              <a:spcAft>
+                <a:spcPts val="300"/>
+              </a:spcAft>
+              <a:buNone/>
+            </a:pPr>
+            <a:r>
+              <a:rPr lang="en-US" sz="1200" dirty="0">
+                <a:solidFill>
+                  <a:srgbClr val="1C2833"/>
+                </a:solidFill>
+                <a:latin typeface="Arial" pitchFamily="34" charset="0"/>
+                <a:ea typeface="Arial" pitchFamily="34" charset="-122"/>
+                <a:cs typeface="Arial" pitchFamily="34" charset="-120"/>
+              </a:rPr>
+              <a:t> Earth sees the fully lit side. → </a:t>
+            </a:r>
+            <a:pPr algn="l" indent="0" marL="0">
+              <a:lnSpc>
+                <a:spcPts val="1620"/>
+              </a:lnSpc>
+              <a:spcAft>
+                <a:spcPts val="300"/>
+              </a:spcAft>
+              <a:buNone/>
+            </a:pPr>
+            <a:r>
+              <a:rPr lang="en-US" sz="1200" i="1" dirty="0">
+                <a:solidFill>
+                  <a:srgbClr val="1C2833"/>
+                </a:solidFill>
+                <a:latin typeface="Arial" pitchFamily="34" charset="0"/>
+                <a:ea typeface="Arial" pitchFamily="34" charset="-122"/>
+                <a:cs typeface="Arial" pitchFamily="34" charset="-120"/>
+              </a:rPr>
+              <a:t>full moon</a:t>
+            </a:r>
+            <a:endParaRPr lang="en-US" sz="1200" dirty="0"/>
+          </a:p>
+          <a:p>
+            <a:pPr algn="l" marL="342900" indent="-342900">
+              <a:lnSpc>
+                <a:spcPts val="1620"/>
+              </a:lnSpc>
+              <a:spcAft>
+                <a:spcPts val="300"/>
+              </a:spcAft>
+              <a:buSzPct val="100000"/>
+              <a:buChar char="•"/>
+            </a:pPr>
+            <a:r>
+              <a:rPr lang="en-US" sz="1200" b="1" dirty="0">
+                <a:solidFill>
+                  <a:srgbClr val="1C2833"/>
+                </a:solidFill>
+                <a:latin typeface="Arial" pitchFamily="34" charset="0"/>
+                <a:ea typeface="Arial" pitchFamily="34" charset="-122"/>
+                <a:cs typeface="Arial" pitchFamily="34" charset="-120"/>
+              </a:rPr>
+              <a:t>Positions 6–8:</a:t>
+            </a:r>
+            <a:pPr algn="l" indent="0" marL="0">
+              <a:lnSpc>
+                <a:spcPts val="1620"/>
+              </a:lnSpc>
+              <a:spcAft>
+                <a:spcPts val="300"/>
+              </a:spcAft>
+              <a:buNone/>
+            </a:pPr>
+            <a:r>
+              <a:rPr lang="en-US" sz="1200" dirty="0">
+                <a:solidFill>
+                  <a:srgbClr val="1C2833"/>
+                </a:solidFill>
+                <a:latin typeface="Arial" pitchFamily="34" charset="0"/>
+                <a:ea typeface="Arial" pitchFamily="34" charset="-122"/>
+                <a:cs typeface="Arial" pitchFamily="34" charset="-120"/>
+              </a:rPr>
+              <a:t> Reverse — gibbous, half, crescent → </a:t>
+            </a:r>
+            <a:pPr algn="l" indent="0" marL="0">
+              <a:lnSpc>
+                <a:spcPts val="1620"/>
+              </a:lnSpc>
+              <a:spcAft>
+                <a:spcPts val="300"/>
+              </a:spcAft>
+              <a:buNone/>
+            </a:pPr>
+            <a:r>
+              <a:rPr lang="en-US" sz="1200" i="1" dirty="0">
+                <a:solidFill>
+                  <a:srgbClr val="1C2833"/>
+                </a:solidFill>
+                <a:latin typeface="Arial" pitchFamily="34" charset="0"/>
+                <a:ea typeface="Arial" pitchFamily="34" charset="-122"/>
+                <a:cs typeface="Arial" pitchFamily="34" charset="-120"/>
+              </a:rPr>
+              <a:t>waning</a:t>
             </a:r>
             <a:endParaRPr lang="en-US" sz="1200" dirty="0"/>
           </a:p>
